--- a/app/templates/universidad_2qrs/plantilla_diplomado.pptx
+++ b/app/templates/universidad_2qrs/plantilla_diplomado.pptx
@@ -313,7 +313,7 @@
           <a:p>
             <a:fld id="{03C7FEFC-EB52-44D6-B3F1-2A7BB7FA4226}" type="datetimeFigureOut">
               <a:rPr lang="es-PE" smtClean="0"/>
-              <a:t>28/01/2026</a:t>
+              <a:t>2/02/2026</a:t>
             </a:fld>
             <a:endParaRPr lang="es-PE" dirty="0"/>
           </a:p>
@@ -478,7 +478,7 @@
           <a:p>
             <a:fld id="{64955E78-CBAA-441B-9163-D9CD5E983BDA}" type="datetimeFigureOut">
               <a:rPr lang="en-US" smtClean="0"/>
-              <a:t>1/28/2026</a:t>
+              <a:t>2/2/2026</a:t>
             </a:fld>
             <a:endParaRPr lang="en-US" dirty="0"/>
           </a:p>
@@ -877,7 +877,7 @@
           <a:p>
             <a:fld id="{5C4C4E00-4716-4B48-9D97-535E4F94A274}" type="datetimeFigureOut">
               <a:rPr lang="es-PE" smtClean="0"/>
-              <a:t>28/01/2026</a:t>
+              <a:t>2/02/2026</a:t>
             </a:fld>
             <a:endParaRPr lang="es-PE" dirty="0"/>
           </a:p>
@@ -1047,7 +1047,7 @@
           <a:p>
             <a:fld id="{5C4C4E00-4716-4B48-9D97-535E4F94A274}" type="datetimeFigureOut">
               <a:rPr lang="es-PE" smtClean="0"/>
-              <a:t>28/01/2026</a:t>
+              <a:t>2/02/2026</a:t>
             </a:fld>
             <a:endParaRPr lang="es-PE" dirty="0"/>
           </a:p>
@@ -1227,7 +1227,7 @@
           <a:p>
             <a:fld id="{5C4C4E00-4716-4B48-9D97-535E4F94A274}" type="datetimeFigureOut">
               <a:rPr lang="es-PE" smtClean="0"/>
-              <a:t>28/01/2026</a:t>
+              <a:t>2/02/2026</a:t>
             </a:fld>
             <a:endParaRPr lang="es-PE" dirty="0"/>
           </a:p>
@@ -1397,7 +1397,7 @@
           <a:p>
             <a:fld id="{5C4C4E00-4716-4B48-9D97-535E4F94A274}" type="datetimeFigureOut">
               <a:rPr lang="es-PE" smtClean="0"/>
-              <a:t>28/01/2026</a:t>
+              <a:t>2/02/2026</a:t>
             </a:fld>
             <a:endParaRPr lang="es-PE" dirty="0"/>
           </a:p>
@@ -1641,7 +1641,7 @@
           <a:p>
             <a:fld id="{5C4C4E00-4716-4B48-9D97-535E4F94A274}" type="datetimeFigureOut">
               <a:rPr lang="es-PE" smtClean="0"/>
-              <a:t>28/01/2026</a:t>
+              <a:t>2/02/2026</a:t>
             </a:fld>
             <a:endParaRPr lang="es-PE" dirty="0"/>
           </a:p>
@@ -1873,7 +1873,7 @@
           <a:p>
             <a:fld id="{5C4C4E00-4716-4B48-9D97-535E4F94A274}" type="datetimeFigureOut">
               <a:rPr lang="es-PE" smtClean="0"/>
-              <a:t>28/01/2026</a:t>
+              <a:t>2/02/2026</a:t>
             </a:fld>
             <a:endParaRPr lang="es-PE" dirty="0"/>
           </a:p>
@@ -2240,7 +2240,7 @@
           <a:p>
             <a:fld id="{5C4C4E00-4716-4B48-9D97-535E4F94A274}" type="datetimeFigureOut">
               <a:rPr lang="es-PE" smtClean="0"/>
-              <a:t>28/01/2026</a:t>
+              <a:t>2/02/2026</a:t>
             </a:fld>
             <a:endParaRPr lang="es-PE" dirty="0"/>
           </a:p>
@@ -2358,7 +2358,7 @@
           <a:p>
             <a:fld id="{5C4C4E00-4716-4B48-9D97-535E4F94A274}" type="datetimeFigureOut">
               <a:rPr lang="es-PE" smtClean="0"/>
-              <a:t>28/01/2026</a:t>
+              <a:t>2/02/2026</a:t>
             </a:fld>
             <a:endParaRPr lang="es-PE" dirty="0"/>
           </a:p>
@@ -2453,7 +2453,7 @@
           <a:p>
             <a:fld id="{5C4C4E00-4716-4B48-9D97-535E4F94A274}" type="datetimeFigureOut">
               <a:rPr lang="es-PE" smtClean="0"/>
-              <a:t>28/01/2026</a:t>
+              <a:t>2/02/2026</a:t>
             </a:fld>
             <a:endParaRPr lang="es-PE" dirty="0"/>
           </a:p>
@@ -2730,7 +2730,7 @@
           <a:p>
             <a:fld id="{5C4C4E00-4716-4B48-9D97-535E4F94A274}" type="datetimeFigureOut">
               <a:rPr lang="es-PE" smtClean="0"/>
-              <a:t>28/01/2026</a:t>
+              <a:t>2/02/2026</a:t>
             </a:fld>
             <a:endParaRPr lang="es-PE" dirty="0"/>
           </a:p>
@@ -2987,7 +2987,7 @@
           <a:p>
             <a:fld id="{5C4C4E00-4716-4B48-9D97-535E4F94A274}" type="datetimeFigureOut">
               <a:rPr lang="es-PE" smtClean="0"/>
-              <a:t>28/01/2026</a:t>
+              <a:t>2/02/2026</a:t>
             </a:fld>
             <a:endParaRPr lang="es-PE" dirty="0"/>
           </a:p>
@@ -3200,7 +3200,7 @@
           <a:p>
             <a:fld id="{5C4C4E00-4716-4B48-9D97-535E4F94A274}" type="datetimeFigureOut">
               <a:rPr lang="es-PE" smtClean="0"/>
-              <a:t>28/01/2026</a:t>
+              <a:t>2/02/2026</a:t>
             </a:fld>
             <a:endParaRPr lang="es-PE" dirty="0"/>
           </a:p>
@@ -5449,14 +5449,14 @@
           <p:nvPr>
             <p:extLst>
               <p:ext uri="{D42A27DB-BD31-4B8C-83A1-F6EECF244321}">
-                <p14:modId xmlns:p14="http://schemas.microsoft.com/office/powerpoint/2010/main" val="1346879900"/>
+                <p14:modId xmlns:p14="http://schemas.microsoft.com/office/powerpoint/2010/main" val="3475725575"/>
               </p:ext>
             </p:extLst>
           </p:nvPr>
         </p:nvGraphicFramePr>
         <p:xfrm>
           <a:off x="745017" y="3109557"/>
-          <a:ext cx="5367967" cy="4064562"/>
+          <a:ext cx="5367967" cy="4710006"/>
         </p:xfrm>
         <a:graphic>
           <a:graphicData uri="http://schemas.openxmlformats.org/drawingml/2006/table">
@@ -5653,7 +5653,7 @@
                             <a:schemeClr val="tx1"/>
                           </a:solidFill>
                         </a:rPr>
-                        <a:t>150</a:t>
+                        <a:t>{{HORAS_MODULO}}</a:t>
                       </a:r>
                     </a:p>
                   </a:txBody>
@@ -5746,7 +5746,7 @@
                             <a:schemeClr val="tx1"/>
                           </a:solidFill>
                         </a:rPr>
-                        <a:t>150</a:t>
+                        <a:t>{{HORAS_MODULO}}</a:t>
                       </a:r>
                     </a:p>
                   </a:txBody>
@@ -5823,7 +5823,7 @@
                             <a:schemeClr val="tx1"/>
                           </a:solidFill>
                         </a:rPr>
-                        <a:t>150</a:t>
+                        <a:t>{{HORAS_MODULO}}</a:t>
                       </a:r>
                     </a:p>
                   </a:txBody>
@@ -5925,7 +5925,7 @@
                             <a:schemeClr val="tx1"/>
                           </a:solidFill>
                         </a:rPr>
-                        <a:t>150</a:t>
+                        <a:t>{{HORAS_MODULO}}</a:t>
                       </a:r>
                     </a:p>
                   </a:txBody>
@@ -6018,7 +6018,7 @@
                             <a:schemeClr val="tx1"/>
                           </a:solidFill>
                         </a:rPr>
-                        <a:t>150</a:t>
+                        <a:t>{{HORAS_MODULO}}</a:t>
                       </a:r>
                     </a:p>
                   </a:txBody>
@@ -6114,7 +6114,7 @@
                             <a:schemeClr val="tx1"/>
                           </a:solidFill>
                         </a:rPr>
-                        <a:t>150</a:t>
+                        <a:t>{{HORAS_MODULO}}</a:t>
                       </a:r>
                     </a:p>
                   </a:txBody>
@@ -6210,7 +6210,7 @@
                             <a:schemeClr val="tx1"/>
                           </a:solidFill>
                         </a:rPr>
-                        <a:t>150</a:t>
+                        <a:t>{{HORAS_MODULO}}</a:t>
                       </a:r>
                     </a:p>
                   </a:txBody>
@@ -6306,7 +6306,7 @@
                             <a:schemeClr val="tx1"/>
                           </a:solidFill>
                         </a:rPr>
-                        <a:t>150</a:t>
+                        <a:t>{{HORAS_MODULO}}</a:t>
                       </a:r>
                     </a:p>
                   </a:txBody>
@@ -6398,7 +6398,7 @@
                         <a:defRPr/>
                       </a:pPr>
                       <a:r>
-                        <a:rPr lang="es-ES" sz="1050" b="0" kern="1200" dirty="0">
+                        <a:rPr lang="es-ES" sz="1050" b="0" kern="1200">
                           <a:solidFill>
                             <a:schemeClr val="dk1"/>
                           </a:solidFill>
@@ -6406,7 +6406,7 @@
                           <a:ea typeface="+mn-ea"/>
                           <a:cs typeface="+mn-cs"/>
                         </a:rPr>
-                        <a:t>1200</a:t>
+                        <a:t>{{HORAS_ACADEMICAS}}</a:t>
                       </a:r>
                       <a:endParaRPr lang="en-US" sz="1050" b="0" kern="1200" dirty="0">
                         <a:solidFill>

--- a/app/templates/universidad_2qrs/plantilla_diplomado.pptx
+++ b/app/templates/universidad_2qrs/plantilla_diplomado.pptx
@@ -119,23 +119,95 @@
 </p:presentation>
 </file>
 
+<file path=ppt/revisionInfo.xml><?xml version="1.0" encoding="utf-8"?>
+<p1510:revInfo xmlns:a="http://schemas.openxmlformats.org/drawingml/2006/main" xmlns:r="http://schemas.openxmlformats.org/officeDocument/2006/relationships" xmlns:p1510="http://schemas.microsoft.com/office/powerpoint/2015/10/main">
+  <p1510:revLst>
+    <p1510:client id="{2ECDD09E-9648-4DA4-91F7-7D06BC5A5820}" v="7" dt="2026-02-27T18:42:59.090"/>
+  </p1510:revLst>
+</p1510:revInfo>
+</file>
+
 <file path=ppt/changesInfos/changesInfo1.xml><?xml version="1.0" encoding="utf-8"?>
 <pc:chgInfo xmlns:a="http://schemas.openxmlformats.org/drawingml/2006/main" xmlns:r="http://schemas.openxmlformats.org/officeDocument/2006/relationships" xmlns:ac="http://schemas.microsoft.com/office/drawing/2013/main/command" xmlns:pc="http://schemas.microsoft.com/office/powerpoint/2013/main/command">
   <pc:docChgLst>
     <pc:chgData name="Benjamín de Jesús Cueva Niño de Guzmán" userId="56da303013910523" providerId="LiveId" clId="{532B7A48-8887-4F62-9537-0BA1FAE83637}"/>
-    <pc:docChg chg="custSel delSld modSld">
-      <pc:chgData name="Benjamín de Jesús Cueva Niño de Guzmán" userId="56da303013910523" providerId="LiveId" clId="{532B7A48-8887-4F62-9537-0BA1FAE83637}" dt="2026-01-14T23:39:32.441" v="15" actId="6549"/>
+    <pc:docChg chg="undo custSel delSld modSld">
+      <pc:chgData name="Benjamín de Jesús Cueva Niño de Guzmán" userId="56da303013910523" providerId="LiveId" clId="{532B7A48-8887-4F62-9537-0BA1FAE83637}" dt="2026-02-27T19:49:42.662" v="40"/>
       <pc:docMkLst>
         <pc:docMk/>
       </pc:docMkLst>
-      <pc:sldChg chg="delSp modSp mod">
-        <pc:chgData name="Benjamín de Jesús Cueva Niño de Guzmán" userId="56da303013910523" providerId="LiveId" clId="{532B7A48-8887-4F62-9537-0BA1FAE83637}" dt="2026-01-14T23:39:12.411" v="12" actId="1036"/>
+      <pc:sldChg chg="addSp delSp modSp mod">
+        <pc:chgData name="Benjamín de Jesús Cueva Niño de Guzmán" userId="56da303013910523" providerId="LiveId" clId="{532B7A48-8887-4F62-9537-0BA1FAE83637}" dt="2026-02-27T19:49:42.662" v="40"/>
         <pc:sldMkLst>
           <pc:docMk/>
           <pc:sldMk cId="2410626708" sldId="277"/>
         </pc:sldMkLst>
+        <pc:spChg chg="mod modVis">
+          <ac:chgData name="Benjamín de Jesús Cueva Niño de Guzmán" userId="56da303013910523" providerId="LiveId" clId="{532B7A48-8887-4F62-9537-0BA1FAE83637}" dt="2026-02-27T18:41:40.971" v="22" actId="14429"/>
+          <ac:spMkLst>
+            <pc:docMk/>
+            <pc:sldMk cId="2410626708" sldId="277"/>
+            <ac:spMk id="2" creationId="{6718E74D-9F2C-B892-E699-1EC198F4A308}"/>
+          </ac:spMkLst>
+        </pc:spChg>
         <pc:spChg chg="mod">
-          <ac:chgData name="Benjamín de Jesús Cueva Niño de Guzmán" userId="56da303013910523" providerId="LiveId" clId="{532B7A48-8887-4F62-9537-0BA1FAE83637}" dt="2026-01-14T23:39:12.411" v="12" actId="1036"/>
+          <ac:chgData name="Benjamín de Jesús Cueva Niño de Guzmán" userId="56da303013910523" providerId="LiveId" clId="{532B7A48-8887-4F62-9537-0BA1FAE83637}" dt="2026-02-27T18:42:45.760" v="30" actId="962"/>
+          <ac:spMkLst>
+            <pc:docMk/>
+            <pc:sldMk cId="2410626708" sldId="277"/>
+            <ac:spMk id="3" creationId="{0F11DFEA-FC46-1F41-8C5B-EA3E3C6BE3C1}"/>
+          </ac:spMkLst>
+        </pc:spChg>
+        <pc:spChg chg="add del mod">
+          <ac:chgData name="Benjamín de Jesús Cueva Niño de Guzmán" userId="56da303013910523" providerId="LiveId" clId="{532B7A48-8887-4F62-9537-0BA1FAE83637}" dt="2026-02-27T19:49:42.662" v="40"/>
+          <ac:spMkLst>
+            <pc:docMk/>
+            <pc:sldMk cId="2410626708" sldId="277"/>
+            <ac:spMk id="6" creationId="{D3A49D29-7E2E-6432-7436-A1B8CDE0CBD2}"/>
+          </ac:spMkLst>
+        </pc:spChg>
+        <pc:spChg chg="mod">
+          <ac:chgData name="Benjamín de Jesús Cueva Niño de Guzmán" userId="56da303013910523" providerId="LiveId" clId="{532B7A48-8887-4F62-9537-0BA1FAE83637}" dt="2026-02-27T18:42:19.873" v="28" actId="962"/>
+          <ac:spMkLst>
+            <pc:docMk/>
+            <pc:sldMk cId="2410626708" sldId="277"/>
+            <ac:spMk id="7" creationId="{F36D8880-B179-580E-0319-C4E9487E072A}"/>
+          </ac:spMkLst>
+        </pc:spChg>
+        <pc:spChg chg="del">
+          <ac:chgData name="Benjamín de Jesús Cueva Niño de Guzmán" userId="56da303013910523" providerId="LiveId" clId="{532B7A48-8887-4F62-9537-0BA1FAE83637}" dt="2026-02-27T18:39:58.557" v="16" actId="478"/>
+          <ac:spMkLst>
+            <pc:docMk/>
+            <pc:sldMk cId="2410626708" sldId="277"/>
+            <ac:spMk id="9" creationId="{86ED2EAC-2620-F68F-6D60-F89352D5B692}"/>
+          </ac:spMkLst>
+        </pc:spChg>
+        <pc:spChg chg="mod">
+          <ac:chgData name="Benjamín de Jesús Cueva Niño de Guzmán" userId="56da303013910523" providerId="LiveId" clId="{532B7A48-8887-4F62-9537-0BA1FAE83637}" dt="2026-02-27T18:42:59.090" v="31" actId="962"/>
+          <ac:spMkLst>
+            <pc:docMk/>
+            <pc:sldMk cId="2410626708" sldId="277"/>
+            <ac:spMk id="17" creationId="{FC88E61B-8665-F7AA-FB48-82299D51180D}"/>
+          </ac:spMkLst>
+        </pc:spChg>
+        <pc:spChg chg="mod">
+          <ac:chgData name="Benjamín de Jesús Cueva Niño de Guzmán" userId="56da303013910523" providerId="LiveId" clId="{532B7A48-8887-4F62-9537-0BA1FAE83637}" dt="2026-02-27T18:42:31.865" v="29" actId="962"/>
+          <ac:spMkLst>
+            <pc:docMk/>
+            <pc:sldMk cId="2410626708" sldId="277"/>
+            <ac:spMk id="19" creationId="{991C4A27-894B-7257-8062-6F839343BAAD}"/>
+          </ac:spMkLst>
+        </pc:spChg>
+        <pc:spChg chg="del">
+          <ac:chgData name="Benjamín de Jesús Cueva Niño de Guzmán" userId="56da303013910523" providerId="LiveId" clId="{532B7A48-8887-4F62-9537-0BA1FAE83637}" dt="2026-02-27T18:40:10.970" v="17" actId="478"/>
+          <ac:spMkLst>
+            <pc:docMk/>
+            <pc:sldMk cId="2410626708" sldId="277"/>
+            <ac:spMk id="20" creationId="{44DA88D6-6D58-D67D-9408-1B4832F17825}"/>
+          </ac:spMkLst>
+        </pc:spChg>
+        <pc:spChg chg="mod">
+          <ac:chgData name="Benjamín de Jesús Cueva Niño de Guzmán" userId="56da303013910523" providerId="LiveId" clId="{532B7A48-8887-4F62-9537-0BA1FAE83637}" dt="2026-02-27T18:42:02.061" v="25"/>
           <ac:spMkLst>
             <pc:docMk/>
             <pc:sldMk cId="2410626708" sldId="277"/>
@@ -143,88 +215,68 @@
           </ac:spMkLst>
         </pc:spChg>
         <pc:spChg chg="mod">
-          <ac:chgData name="Benjamín de Jesús Cueva Niño de Guzmán" userId="56da303013910523" providerId="LiveId" clId="{532B7A48-8887-4F62-9537-0BA1FAE83637}" dt="2026-01-14T23:39:12.411" v="12" actId="1036"/>
+          <ac:chgData name="Benjamín de Jesús Cueva Niño de Guzmán" userId="56da303013910523" providerId="LiveId" clId="{532B7A48-8887-4F62-9537-0BA1FAE83637}" dt="2026-02-27T18:42:03.214" v="26"/>
           <ac:spMkLst>
             <pc:docMk/>
             <pc:sldMk cId="2410626708" sldId="277"/>
             <ac:spMk id="23" creationId="{D962536F-CB9F-1938-8F28-5D8C8FE943C7}"/>
           </ac:spMkLst>
         </pc:spChg>
-        <pc:picChg chg="del">
-          <ac:chgData name="Benjamín de Jesús Cueva Niño de Guzmán" userId="56da303013910523" providerId="LiveId" clId="{532B7A48-8887-4F62-9537-0BA1FAE83637}" dt="2026-01-14T23:39:07" v="4" actId="478"/>
+        <pc:picChg chg="mod">
+          <ac:chgData name="Benjamín de Jesús Cueva Niño de Guzmán" userId="56da303013910523" providerId="LiveId" clId="{532B7A48-8887-4F62-9537-0BA1FAE83637}" dt="2026-02-27T18:42:00.579" v="24"/>
           <ac:picMkLst>
             <pc:docMk/>
             <pc:sldMk cId="2410626708" sldId="277"/>
-            <ac:picMk id="18" creationId="{65D7DBE5-F3CD-0E62-8756-B223F377361E}"/>
+            <ac:picMk id="4" creationId="{BC1BF896-3A0A-2D18-2C55-A99B63C83C9E}"/>
+          </ac:picMkLst>
+        </pc:picChg>
+        <pc:picChg chg="mod">
+          <ac:chgData name="Benjamín de Jesús Cueva Niño de Guzmán" userId="56da303013910523" providerId="LiveId" clId="{532B7A48-8887-4F62-9537-0BA1FAE83637}" dt="2026-02-27T18:43:13.475" v="35"/>
+          <ac:picMkLst>
+            <pc:docMk/>
+            <pc:sldMk cId="2410626708" sldId="277"/>
+            <ac:picMk id="5" creationId="{E8D55156-67B8-4336-A410-DB422B06644F}"/>
+          </ac:picMkLst>
+        </pc:picChg>
+        <pc:picChg chg="mod">
+          <ac:chgData name="Benjamín de Jesús Cueva Niño de Guzmán" userId="56da303013910523" providerId="LiveId" clId="{532B7A48-8887-4F62-9537-0BA1FAE83637}" dt="2026-02-27T18:42:06.294" v="27"/>
+          <ac:picMkLst>
+            <pc:docMk/>
+            <pc:sldMk cId="2410626708" sldId="277"/>
+            <ac:picMk id="8" creationId="{E620381B-4FC1-7AC1-6064-1BDB1EDD40BC}"/>
+          </ac:picMkLst>
+        </pc:picChg>
+        <pc:picChg chg="mod">
+          <ac:chgData name="Benjamín de Jesús Cueva Niño de Guzmán" userId="56da303013910523" providerId="LiveId" clId="{532B7A48-8887-4F62-9537-0BA1FAE83637}" dt="2026-02-27T18:43:02.463" v="32"/>
+          <ac:picMkLst>
+            <pc:docMk/>
+            <pc:sldMk cId="2410626708" sldId="277"/>
+            <ac:picMk id="16" creationId="{B7718B06-55CA-2E3C-6C80-F4BE84446227}"/>
+          </ac:picMkLst>
+        </pc:picChg>
+        <pc:picChg chg="mod">
+          <ac:chgData name="Benjamín de Jesús Cueva Niño de Guzmán" userId="56da303013910523" providerId="LiveId" clId="{532B7A48-8887-4F62-9537-0BA1FAE83637}" dt="2026-02-27T18:43:10.965" v="34"/>
+          <ac:picMkLst>
+            <pc:docMk/>
+            <pc:sldMk cId="2410626708" sldId="277"/>
+            <ac:picMk id="21" creationId="{F747E739-70C9-F0BF-4A9E-62BD5CFA55FA}"/>
           </ac:picMkLst>
         </pc:picChg>
       </pc:sldChg>
-      <pc:sldChg chg="delSp modSp mod">
-        <pc:chgData name="Benjamín de Jesús Cueva Niño de Guzmán" userId="56da303013910523" providerId="LiveId" clId="{532B7A48-8887-4F62-9537-0BA1FAE83637}" dt="2026-01-14T23:39:32.441" v="15" actId="6549"/>
+      <pc:sldChg chg="modSp mod">
+        <pc:chgData name="Benjamín de Jesús Cueva Niño de Guzmán" userId="56da303013910523" providerId="LiveId" clId="{532B7A48-8887-4F62-9537-0BA1FAE83637}" dt="2026-02-27T18:40:25.918" v="18" actId="1036"/>
         <pc:sldMkLst>
           <pc:docMk/>
           <pc:sldMk cId="4084903007" sldId="278"/>
         </pc:sldMkLst>
-        <pc:spChg chg="mod">
-          <ac:chgData name="Benjamín de Jesús Cueva Niño de Guzmán" userId="56da303013910523" providerId="LiveId" clId="{532B7A48-8887-4F62-9537-0BA1FAE83637}" dt="2026-01-14T23:39:32.441" v="15" actId="6549"/>
-          <ac:spMkLst>
-            <pc:docMk/>
-            <pc:sldMk cId="4084903007" sldId="278"/>
-            <ac:spMk id="25" creationId="{1BD7C6F0-73B6-617B-0B21-594BAED95EBF}"/>
-          </ac:spMkLst>
-        </pc:spChg>
-        <pc:picChg chg="del">
-          <ac:chgData name="Benjamín de Jesús Cueva Niño de Guzmán" userId="56da303013910523" providerId="LiveId" clId="{532B7A48-8887-4F62-9537-0BA1FAE83637}" dt="2026-01-14T23:39:27.620" v="13" actId="478"/>
+        <pc:picChg chg="mod">
+          <ac:chgData name="Benjamín de Jesús Cueva Niño de Guzmán" userId="56da303013910523" providerId="LiveId" clId="{532B7A48-8887-4F62-9537-0BA1FAE83637}" dt="2026-02-27T18:40:25.918" v="18" actId="1036"/>
           <ac:picMkLst>
             <pc:docMk/>
             <pc:sldMk cId="4084903007" sldId="278"/>
-            <ac:picMk id="7" creationId="{1A5F3F7F-F6EA-295F-A298-EE7118A8FF90}"/>
+            <ac:picMk id="3" creationId="{7732230B-A029-72C0-9D5B-2705D3A02338}"/>
           </ac:picMkLst>
         </pc:picChg>
-        <pc:picChg chg="del">
-          <ac:chgData name="Benjamín de Jesús Cueva Niño de Guzmán" userId="56da303013910523" providerId="LiveId" clId="{532B7A48-8887-4F62-9537-0BA1FAE83637}" dt="2026-01-14T23:39:29.163" v="14" actId="478"/>
-          <ac:picMkLst>
-            <pc:docMk/>
-            <pc:sldMk cId="4084903007" sldId="278"/>
-            <ac:picMk id="17" creationId="{E2F7B553-0DD8-3254-E8A5-8AFCBCCE12B1}"/>
-          </ac:picMkLst>
-        </pc:picChg>
-        <pc:picChg chg="del">
-          <ac:chgData name="Benjamín de Jesús Cueva Niño de Guzmán" userId="56da303013910523" providerId="LiveId" clId="{532B7A48-8887-4F62-9537-0BA1FAE83637}" dt="2026-01-14T23:39:08.807" v="5" actId="478"/>
-          <ac:picMkLst>
-            <pc:docMk/>
-            <pc:sldMk cId="4084903007" sldId="278"/>
-            <ac:picMk id="26" creationId="{39C9745C-4A41-3AC5-CAAD-095724A20EBB}"/>
-          </ac:picMkLst>
-        </pc:picChg>
-      </pc:sldChg>
-      <pc:sldChg chg="del">
-        <pc:chgData name="Benjamín de Jesús Cueva Niño de Guzmán" userId="56da303013910523" providerId="LiveId" clId="{532B7A48-8887-4F62-9537-0BA1FAE83637}" dt="2026-01-14T23:38:56.402" v="2" actId="47"/>
-        <pc:sldMkLst>
-          <pc:docMk/>
-          <pc:sldMk cId="1379650257" sldId="279"/>
-        </pc:sldMkLst>
-      </pc:sldChg>
-      <pc:sldChg chg="del">
-        <pc:chgData name="Benjamín de Jesús Cueva Niño de Guzmán" userId="56da303013910523" providerId="LiveId" clId="{532B7A48-8887-4F62-9537-0BA1FAE83637}" dt="2026-01-14T23:38:56.766" v="3" actId="47"/>
-        <pc:sldMkLst>
-          <pc:docMk/>
-          <pc:sldMk cId="2353653050" sldId="280"/>
-        </pc:sldMkLst>
-      </pc:sldChg>
-      <pc:sldChg chg="del">
-        <pc:chgData name="Benjamín de Jesús Cueva Niño de Guzmán" userId="56da303013910523" providerId="LiveId" clId="{532B7A48-8887-4F62-9537-0BA1FAE83637}" dt="2026-01-14T23:38:55.858" v="0" actId="47"/>
-        <pc:sldMkLst>
-          <pc:docMk/>
-          <pc:sldMk cId="4178494260" sldId="281"/>
-        </pc:sldMkLst>
-      </pc:sldChg>
-      <pc:sldChg chg="del">
-        <pc:chgData name="Benjamín de Jesús Cueva Niño de Guzmán" userId="56da303013910523" providerId="LiveId" clId="{532B7A48-8887-4F62-9537-0BA1FAE83637}" dt="2026-01-14T23:38:56.003" v="1" actId="47"/>
-        <pc:sldMkLst>
-          <pc:docMk/>
-          <pc:sldMk cId="1741124028" sldId="282"/>
-        </pc:sldMkLst>
       </pc:sldChg>
     </pc:docChg>
   </pc:docChgLst>
@@ -313,7 +365,7 @@
           <a:p>
             <a:fld id="{03C7FEFC-EB52-44D6-B3F1-2A7BB7FA4226}" type="datetimeFigureOut">
               <a:rPr lang="es-PE" smtClean="0"/>
-              <a:t>2/02/2026</a:t>
+              <a:t>27/02/2026</a:t>
             </a:fld>
             <a:endParaRPr lang="es-PE" dirty="0"/>
           </a:p>
@@ -478,7 +530,7 @@
           <a:p>
             <a:fld id="{64955E78-CBAA-441B-9163-D9CD5E983BDA}" type="datetimeFigureOut">
               <a:rPr lang="en-US" smtClean="0"/>
-              <a:t>2/2/2026</a:t>
+              <a:t>2/27/2026</a:t>
             </a:fld>
             <a:endParaRPr lang="en-US" dirty="0"/>
           </a:p>
@@ -877,7 +929,7 @@
           <a:p>
             <a:fld id="{5C4C4E00-4716-4B48-9D97-535E4F94A274}" type="datetimeFigureOut">
               <a:rPr lang="es-PE" smtClean="0"/>
-              <a:t>2/02/2026</a:t>
+              <a:t>27/02/2026</a:t>
             </a:fld>
             <a:endParaRPr lang="es-PE" dirty="0"/>
           </a:p>
@@ -1047,7 +1099,7 @@
           <a:p>
             <a:fld id="{5C4C4E00-4716-4B48-9D97-535E4F94A274}" type="datetimeFigureOut">
               <a:rPr lang="es-PE" smtClean="0"/>
-              <a:t>2/02/2026</a:t>
+              <a:t>27/02/2026</a:t>
             </a:fld>
             <a:endParaRPr lang="es-PE" dirty="0"/>
           </a:p>
@@ -1227,7 +1279,7 @@
           <a:p>
             <a:fld id="{5C4C4E00-4716-4B48-9D97-535E4F94A274}" type="datetimeFigureOut">
               <a:rPr lang="es-PE" smtClean="0"/>
-              <a:t>2/02/2026</a:t>
+              <a:t>27/02/2026</a:t>
             </a:fld>
             <a:endParaRPr lang="es-PE" dirty="0"/>
           </a:p>
@@ -1397,7 +1449,7 @@
           <a:p>
             <a:fld id="{5C4C4E00-4716-4B48-9D97-535E4F94A274}" type="datetimeFigureOut">
               <a:rPr lang="es-PE" smtClean="0"/>
-              <a:t>2/02/2026</a:t>
+              <a:t>27/02/2026</a:t>
             </a:fld>
             <a:endParaRPr lang="es-PE" dirty="0"/>
           </a:p>
@@ -1641,7 +1693,7 @@
           <a:p>
             <a:fld id="{5C4C4E00-4716-4B48-9D97-535E4F94A274}" type="datetimeFigureOut">
               <a:rPr lang="es-PE" smtClean="0"/>
-              <a:t>2/02/2026</a:t>
+              <a:t>27/02/2026</a:t>
             </a:fld>
             <a:endParaRPr lang="es-PE" dirty="0"/>
           </a:p>
@@ -1873,7 +1925,7 @@
           <a:p>
             <a:fld id="{5C4C4E00-4716-4B48-9D97-535E4F94A274}" type="datetimeFigureOut">
               <a:rPr lang="es-PE" smtClean="0"/>
-              <a:t>2/02/2026</a:t>
+              <a:t>27/02/2026</a:t>
             </a:fld>
             <a:endParaRPr lang="es-PE" dirty="0"/>
           </a:p>
@@ -2240,7 +2292,7 @@
           <a:p>
             <a:fld id="{5C4C4E00-4716-4B48-9D97-535E4F94A274}" type="datetimeFigureOut">
               <a:rPr lang="es-PE" smtClean="0"/>
-              <a:t>2/02/2026</a:t>
+              <a:t>27/02/2026</a:t>
             </a:fld>
             <a:endParaRPr lang="es-PE" dirty="0"/>
           </a:p>
@@ -2358,7 +2410,7 @@
           <a:p>
             <a:fld id="{5C4C4E00-4716-4B48-9D97-535E4F94A274}" type="datetimeFigureOut">
               <a:rPr lang="es-PE" smtClean="0"/>
-              <a:t>2/02/2026</a:t>
+              <a:t>27/02/2026</a:t>
             </a:fld>
             <a:endParaRPr lang="es-PE" dirty="0"/>
           </a:p>
@@ -2453,7 +2505,7 @@
           <a:p>
             <a:fld id="{5C4C4E00-4716-4B48-9D97-535E4F94A274}" type="datetimeFigureOut">
               <a:rPr lang="es-PE" smtClean="0"/>
-              <a:t>2/02/2026</a:t>
+              <a:t>27/02/2026</a:t>
             </a:fld>
             <a:endParaRPr lang="es-PE" dirty="0"/>
           </a:p>
@@ -2730,7 +2782,7 @@
           <a:p>
             <a:fld id="{5C4C4E00-4716-4B48-9D97-535E4F94A274}" type="datetimeFigureOut">
               <a:rPr lang="es-PE" smtClean="0"/>
-              <a:t>2/02/2026</a:t>
+              <a:t>27/02/2026</a:t>
             </a:fld>
             <a:endParaRPr lang="es-PE" dirty="0"/>
           </a:p>
@@ -2987,7 +3039,7 @@
           <a:p>
             <a:fld id="{5C4C4E00-4716-4B48-9D97-535E4F94A274}" type="datetimeFigureOut">
               <a:rPr lang="es-PE" smtClean="0"/>
-              <a:t>2/02/2026</a:t>
+              <a:t>27/02/2026</a:t>
             </a:fld>
             <a:endParaRPr lang="es-PE" dirty="0"/>
           </a:p>
@@ -3200,7 +3252,7 @@
           <a:p>
             <a:fld id="{5C4C4E00-4716-4B48-9D97-535E4F94A274}" type="datetimeFigureOut">
               <a:rPr lang="es-PE" smtClean="0"/>
-              <a:t>2/02/2026</a:t>
+              <a:t>27/02/2026</a:t>
             </a:fld>
             <a:endParaRPr lang="es-PE" dirty="0"/>
           </a:p>
@@ -3621,7 +3673,7 @@
             </a:extLst>
           </p:cNvPr>
           <p:cNvPicPr>
-            <a:picLocks noChangeAspect="1"/>
+            <a:picLocks noGrp="1" noRot="1" noChangeAspect="1" noMove="1" noResize="1" noEditPoints="1" noAdjustHandles="1" noChangeArrowheads="1" noChangeShapeType="1" noCrop="1"/>
           </p:cNvPicPr>
           <p:nvPr/>
         </p:nvPicPr>
@@ -3656,7 +3708,7 @@
             </a:extLst>
           </p:cNvPr>
           <p:cNvPicPr>
-            <a:picLocks noChangeAspect="1"/>
+            <a:picLocks noGrp="1" noRot="1" noChangeAspect="1" noMove="1" noResize="1" noEditPoints="1" noAdjustHandles="1" noChangeArrowheads="1" noChangeShapeType="1" noCrop="1"/>
           </p:cNvPicPr>
           <p:nvPr/>
         </p:nvPicPr>
@@ -3684,7 +3736,7 @@
       </p:pic>
       <p:sp>
         <p:nvSpPr>
-          <p:cNvPr id="2" name="CuadroTexto 1">
+          <p:cNvPr id="2" name="PH_NOMBRES_APELLIDOS">
             <a:extLst>
               <a:ext uri="{FF2B5EF4-FFF2-40B4-BE49-F238E27FC236}">
                 <a16:creationId xmlns:a16="http://schemas.microsoft.com/office/drawing/2014/main" id="{6718E74D-9F2C-B892-E699-1EC198F4A308}"/>
@@ -3738,7 +3790,9 @@
               </a:ext>
             </a:extLst>
           </p:cNvPr>
-          <p:cNvSpPr txBox="1"/>
+          <p:cNvSpPr txBox="1">
+            <a:spLocks noGrp="1" noRot="1" noMove="1" noResize="1" noEditPoints="1" noAdjustHandles="1" noChangeArrowheads="1" noChangeShapeType="1"/>
+          </p:cNvSpPr>
           <p:nvPr/>
         </p:nvSpPr>
         <p:spPr>
@@ -3809,7 +3863,9 @@
               </a:ext>
             </a:extLst>
           </p:cNvPr>
-          <p:cNvPicPr/>
+          <p:cNvPicPr>
+            <a:picLocks noGrp="1" noRot="1" noMove="1" noResize="1" noEditPoints="1" noAdjustHandles="1" noChangeArrowheads="1" noChangeShapeType="1" noCrop="1"/>
+          </p:cNvPicPr>
           <p:nvPr/>
         </p:nvPicPr>
         <p:blipFill>
@@ -3851,7 +3907,7 @@
       </p:pic>
       <p:sp>
         <p:nvSpPr>
-          <p:cNvPr id="17" name="Rectángulo 16">
+          <p:cNvPr id="17" name="PH_TIPO_DOCUMENTO">
             <a:extLst>
               <a:ext uri="{FF2B5EF4-FFF2-40B4-BE49-F238E27FC236}">
                 <a16:creationId xmlns:a16="http://schemas.microsoft.com/office/drawing/2014/main" id="{FC88E61B-8665-F7AA-FB48-82299D51180D}"/>
@@ -3891,7 +3947,7 @@
       </p:sp>
       <p:sp>
         <p:nvSpPr>
-          <p:cNvPr id="3" name="Rectángulo 2">
+          <p:cNvPr id="3" name="PH_CONCEDIDO_A">
             <a:extLst>
               <a:ext uri="{FF2B5EF4-FFF2-40B4-BE49-F238E27FC236}">
                 <a16:creationId xmlns:a16="http://schemas.microsoft.com/office/drawing/2014/main" id="{0F11DFEA-FC46-1F41-8C5B-EA3E3C6BE3C1}"/>
@@ -3960,7 +4016,7 @@
       </p:sp>
       <p:sp>
         <p:nvSpPr>
-          <p:cNvPr id="19" name="Rectangle 60">
+          <p:cNvPr id="19" name="PH_CONTENIDO_PRINCIPAL">
             <a:extLst>
               <a:ext uri="{FF2B5EF4-FFF2-40B4-BE49-F238E27FC236}">
                 <a16:creationId xmlns:a16="http://schemas.microsoft.com/office/drawing/2014/main" id="{991C4A27-894B-7257-8062-6F839343BAAD}"/>
@@ -4214,7 +4270,7 @@
       </p:sp>
       <p:sp>
         <p:nvSpPr>
-          <p:cNvPr id="7" name="Rectángulo 6">
+          <p:cNvPr id="7" name="PH_FECHA_EMISION_LARGA">
             <a:extLst>
               <a:ext uri="{FF2B5EF4-FFF2-40B4-BE49-F238E27FC236}">
                 <a16:creationId xmlns:a16="http://schemas.microsoft.com/office/drawing/2014/main" id="{F36D8880-B179-580E-0319-C4E9487E072A}"/>
@@ -4263,57 +4319,6 @@
                 <a:prstClr val="black"/>
               </a:solidFill>
               <a:latin typeface="Times New Roman" panose="02020603050405020304" pitchFamily="18" charset="0"/>
-              <a:ea typeface="Cambria Math" panose="02040503050406030204" pitchFamily="18" charset="0"/>
-              <a:cs typeface="Times New Roman" panose="02020603050405020304" pitchFamily="18" charset="0"/>
-            </a:endParaRPr>
-          </a:p>
-        </p:txBody>
-      </p:sp>
-      <p:sp>
-        <p:nvSpPr>
-          <p:cNvPr id="20" name="Rectángulo 19">
-            <a:extLst>
-              <a:ext uri="{FF2B5EF4-FFF2-40B4-BE49-F238E27FC236}">
-                <a16:creationId xmlns:a16="http://schemas.microsoft.com/office/drawing/2014/main" id="{44DA88D6-6D58-D67D-9408-1B4832F17825}"/>
-              </a:ext>
-            </a:extLst>
-          </p:cNvPr>
-          <p:cNvSpPr/>
-          <p:nvPr/>
-        </p:nvSpPr>
-        <p:spPr>
-          <a:xfrm>
-            <a:off x="1071040" y="3342633"/>
-            <a:ext cx="5167704" cy="184666"/>
-          </a:xfrm>
-          <a:prstGeom prst="rect">
-            <a:avLst/>
-          </a:prstGeom>
-        </p:spPr>
-        <p:txBody>
-          <a:bodyPr wrap="square">
-            <a:spAutoFit/>
-          </a:bodyPr>
-          <a:lstStyle/>
-          <a:p>
-            <a:pPr algn="ctr">
-              <a:spcBef>
-                <a:spcPts val="415"/>
-              </a:spcBef>
-              <a:spcAft>
-                <a:spcPts val="415"/>
-              </a:spcAft>
-            </a:pPr>
-            <a:r>
-              <a:rPr lang="es-PE" sz="600" b="1" dirty="0">
-                <a:latin typeface="Cambria Math" panose="02040503050406030204" pitchFamily="18" charset="0"/>
-                <a:ea typeface="Cambria Math" panose="02040503050406030204" pitchFamily="18" charset="0"/>
-                <a:cs typeface="Times New Roman" panose="02020603050405020304" pitchFamily="18" charset="0"/>
-              </a:rPr>
-              <a:t> </a:t>
-            </a:r>
-            <a:endParaRPr lang="en-US" sz="900" b="1" dirty="0">
-              <a:latin typeface="Cambria Math" panose="02040503050406030204" pitchFamily="18" charset="0"/>
               <a:ea typeface="Cambria Math" panose="02040503050406030204" pitchFamily="18" charset="0"/>
               <a:cs typeface="Times New Roman" panose="02020603050405020304" pitchFamily="18" charset="0"/>
             </a:endParaRPr>
@@ -4330,7 +4335,7 @@
             </a:extLst>
           </p:cNvPr>
           <p:cNvPicPr>
-            <a:picLocks noChangeAspect="1"/>
+            <a:picLocks noGrp="1" noRot="1" noChangeAspect="1" noMove="1" noResize="1" noEditPoints="1" noAdjustHandles="1" noChangeArrowheads="1" noChangeShapeType="1" noCrop="1"/>
           </p:cNvPicPr>
           <p:nvPr/>
         </p:nvPicPr>
@@ -4364,7 +4369,9 @@
               </a:ext>
             </a:extLst>
           </p:cNvPr>
-          <p:cNvSpPr txBox="1"/>
+          <p:cNvSpPr txBox="1">
+            <a:spLocks noGrp="1" noRot="1" noMove="1" noResize="1" noEditPoints="1" noAdjustHandles="1" noChangeArrowheads="1" noChangeShapeType="1"/>
+          </p:cNvSpPr>
           <p:nvPr/>
         </p:nvSpPr>
         <p:spPr>
@@ -4413,7 +4420,9 @@
               </a:ext>
             </a:extLst>
           </p:cNvPr>
-          <p:cNvSpPr txBox="1"/>
+          <p:cNvSpPr txBox="1">
+            <a:spLocks noGrp="1" noRot="1" noMove="1" noResize="1" noEditPoints="1" noAdjustHandles="1" noChangeArrowheads="1" noChangeShapeType="1"/>
+          </p:cNvSpPr>
           <p:nvPr/>
         </p:nvSpPr>
         <p:spPr>
@@ -4453,51 +4462,6 @@
           </a:p>
         </p:txBody>
       </p:sp>
-      <p:sp>
-        <p:nvSpPr>
-          <p:cNvPr id="9" name="AutoShape 4" descr="blob:https://web.whatsapp.com/34fb4399-25ce-4206-a049-279514aee91f">
-            <a:extLst>
-              <a:ext uri="{FF2B5EF4-FFF2-40B4-BE49-F238E27FC236}">
-                <a16:creationId xmlns:a16="http://schemas.microsoft.com/office/drawing/2014/main" id="{86ED2EAC-2620-F68F-6D60-F89352D5B692}"/>
-              </a:ext>
-            </a:extLst>
-          </p:cNvPr>
-          <p:cNvSpPr>
-            <a:spLocks noChangeAspect="1" noChangeArrowheads="1"/>
-          </p:cNvSpPr>
-          <p:nvPr/>
-        </p:nvSpPr>
-        <p:spPr bwMode="auto">
-          <a:xfrm>
-            <a:off x="-893235" y="1427740"/>
-            <a:ext cx="4278942" cy="4278956"/>
-          </a:xfrm>
-          <a:prstGeom prst="rect">
-            <a:avLst/>
-          </a:prstGeom>
-          <a:noFill/>
-          <a:extLst>
-            <a:ext uri="{909E8E84-426E-40DD-AFC4-6F175D3DCCD1}">
-              <a14:hiddenFill xmlns:a14="http://schemas.microsoft.com/office/drawing/2010/main">
-                <a:solidFill>
-                  <a:srgbClr val="FFFFFF"/>
-                </a:solidFill>
-              </a14:hiddenFill>
-            </a:ext>
-          </a:extLst>
-        </p:spPr>
-        <p:txBody>
-          <a:bodyPr vert="horz" wrap="square" lIns="91440" tIns="45720" rIns="91440" bIns="45720" numCol="1" anchor="t" anchorCtr="0" compatLnSpc="1">
-            <a:prstTxWarp prst="textNoShape">
-              <a:avLst/>
-            </a:prstTxWarp>
-          </a:bodyPr>
-          <a:lstStyle/>
-          <a:p>
-            <a:endParaRPr lang="es-PE"/>
-          </a:p>
-        </p:txBody>
-      </p:sp>
       <p:pic>
         <p:nvPicPr>
           <p:cNvPr id="8" name="Imagen 7">
@@ -4508,7 +4472,7 @@
             </a:extLst>
           </p:cNvPr>
           <p:cNvPicPr>
-            <a:picLocks noChangeAspect="1"/>
+            <a:picLocks noGrp="1" noRot="1" noChangeAspect="1" noMove="1" noResize="1" noEditPoints="1" noAdjustHandles="1" noChangeArrowheads="1" noChangeShapeType="1" noCrop="1"/>
           </p:cNvPicPr>
           <p:nvPr/>
         </p:nvPicPr>
@@ -6553,7 +6517,7 @@
         </p:blipFill>
         <p:spPr>
           <a:xfrm>
-            <a:off x="1482184" y="9088243"/>
+            <a:off x="1482184" y="9101690"/>
             <a:ext cx="368250" cy="202914"/>
           </a:xfrm>
           <a:prstGeom prst="rect">

--- a/app/templates/universidad_2qrs/plantilla_diplomado.pptx
+++ b/app/templates/universidad_2qrs/plantilla_diplomado.pptx
@@ -122,7 +122,7 @@
 <file path=ppt/revisionInfo.xml><?xml version="1.0" encoding="utf-8"?>
 <p1510:revInfo xmlns:a="http://schemas.openxmlformats.org/drawingml/2006/main" xmlns:r="http://schemas.openxmlformats.org/officeDocument/2006/relationships" xmlns:p1510="http://schemas.microsoft.com/office/powerpoint/2015/10/main">
   <p1510:revLst>
-    <p1510:client id="{2ECDD09E-9648-4DA4-91F7-7D06BC5A5820}" v="7" dt="2026-02-27T18:42:59.090"/>
+    <p1510:client id="{2ECDD09E-9648-4DA4-91F7-7D06BC5A5820}" v="12" dt="2026-03-02T03:07:16.010"/>
   </p1510:revLst>
 </p1510:revInfo>
 </file>
@@ -132,18 +132,18 @@
   <pc:docChgLst>
     <pc:chgData name="Benjamín de Jesús Cueva Niño de Guzmán" userId="56da303013910523" providerId="LiveId" clId="{532B7A48-8887-4F62-9537-0BA1FAE83637}"/>
     <pc:docChg chg="undo custSel delSld modSld">
-      <pc:chgData name="Benjamín de Jesús Cueva Niño de Guzmán" userId="56da303013910523" providerId="LiveId" clId="{532B7A48-8887-4F62-9537-0BA1FAE83637}" dt="2026-02-27T19:49:42.662" v="40"/>
+      <pc:chgData name="Benjamín de Jesús Cueva Niño de Guzmán" userId="56da303013910523" providerId="LiveId" clId="{532B7A48-8887-4F62-9537-0BA1FAE83637}" dt="2026-03-02T03:07:16.010" v="135" actId="962"/>
       <pc:docMkLst>
         <pc:docMk/>
       </pc:docMkLst>
       <pc:sldChg chg="addSp delSp modSp mod">
-        <pc:chgData name="Benjamín de Jesús Cueva Niño de Guzmán" userId="56da303013910523" providerId="LiveId" clId="{532B7A48-8887-4F62-9537-0BA1FAE83637}" dt="2026-02-27T19:49:42.662" v="40"/>
+        <pc:chgData name="Benjamín de Jesús Cueva Niño de Guzmán" userId="56da303013910523" providerId="LiveId" clId="{532B7A48-8887-4F62-9537-0BA1FAE83637}" dt="2026-03-02T03:06:24.809" v="117" actId="164"/>
         <pc:sldMkLst>
           <pc:docMk/>
           <pc:sldMk cId="2410626708" sldId="277"/>
         </pc:sldMkLst>
         <pc:spChg chg="mod modVis">
-          <ac:chgData name="Benjamín de Jesús Cueva Niño de Guzmán" userId="56da303013910523" providerId="LiveId" clId="{532B7A48-8887-4F62-9537-0BA1FAE83637}" dt="2026-02-27T18:41:40.971" v="22" actId="14429"/>
+          <ac:chgData name="Benjamín de Jesús Cueva Niño de Guzmán" userId="56da303013910523" providerId="LiveId" clId="{532B7A48-8887-4F62-9537-0BA1FAE83637}" dt="2026-03-02T03:05:50.881" v="110" actId="1036"/>
           <ac:spMkLst>
             <pc:docMk/>
             <pc:sldMk cId="2410626708" sldId="277"/>
@@ -166,20 +166,12 @@
             <ac:spMk id="6" creationId="{D3A49D29-7E2E-6432-7436-A1B8CDE0CBD2}"/>
           </ac:spMkLst>
         </pc:spChg>
-        <pc:spChg chg="mod">
-          <ac:chgData name="Benjamín de Jesús Cueva Niño de Guzmán" userId="56da303013910523" providerId="LiveId" clId="{532B7A48-8887-4F62-9537-0BA1FAE83637}" dt="2026-02-27T18:42:19.873" v="28" actId="962"/>
+        <pc:spChg chg="mod topLvl">
+          <ac:chgData name="Benjamín de Jesús Cueva Niño de Guzmán" userId="56da303013910523" providerId="LiveId" clId="{532B7A48-8887-4F62-9537-0BA1FAE83637}" dt="2026-03-02T03:06:24.809" v="117" actId="164"/>
           <ac:spMkLst>
             <pc:docMk/>
             <pc:sldMk cId="2410626708" sldId="277"/>
             <ac:spMk id="7" creationId="{F36D8880-B179-580E-0319-C4E9487E072A}"/>
-          </ac:spMkLst>
-        </pc:spChg>
-        <pc:spChg chg="del">
-          <ac:chgData name="Benjamín de Jesús Cueva Niño de Guzmán" userId="56da303013910523" providerId="LiveId" clId="{532B7A48-8887-4F62-9537-0BA1FAE83637}" dt="2026-02-27T18:39:58.557" v="16" actId="478"/>
-          <ac:spMkLst>
-            <pc:docMk/>
-            <pc:sldMk cId="2410626708" sldId="277"/>
-            <ac:spMk id="9" creationId="{86ED2EAC-2620-F68F-6D60-F89352D5B692}"/>
           </ac:spMkLst>
         </pc:spChg>
         <pc:spChg chg="mod">
@@ -190,20 +182,12 @@
             <ac:spMk id="17" creationId="{FC88E61B-8665-F7AA-FB48-82299D51180D}"/>
           </ac:spMkLst>
         </pc:spChg>
-        <pc:spChg chg="mod">
-          <ac:chgData name="Benjamín de Jesús Cueva Niño de Guzmán" userId="56da303013910523" providerId="LiveId" clId="{532B7A48-8887-4F62-9537-0BA1FAE83637}" dt="2026-02-27T18:42:31.865" v="29" actId="962"/>
+        <pc:spChg chg="mod topLvl">
+          <ac:chgData name="Benjamín de Jesús Cueva Niño de Guzmán" userId="56da303013910523" providerId="LiveId" clId="{532B7A48-8887-4F62-9537-0BA1FAE83637}" dt="2026-03-02T03:06:24.809" v="117" actId="164"/>
           <ac:spMkLst>
             <pc:docMk/>
             <pc:sldMk cId="2410626708" sldId="277"/>
             <ac:spMk id="19" creationId="{991C4A27-894B-7257-8062-6F839343BAAD}"/>
-          </ac:spMkLst>
-        </pc:spChg>
-        <pc:spChg chg="del">
-          <ac:chgData name="Benjamín de Jesús Cueva Niño de Guzmán" userId="56da303013910523" providerId="LiveId" clId="{532B7A48-8887-4F62-9537-0BA1FAE83637}" dt="2026-02-27T18:40:10.970" v="17" actId="478"/>
-          <ac:spMkLst>
-            <pc:docMk/>
-            <pc:sldMk cId="2410626708" sldId="277"/>
-            <ac:spMk id="20" creationId="{44DA88D6-6D58-D67D-9408-1B4832F17825}"/>
           </ac:spMkLst>
         </pc:spChg>
         <pc:spChg chg="mod">
@@ -222,6 +206,22 @@
             <ac:spMk id="23" creationId="{D962536F-CB9F-1938-8F28-5D8C8FE943C7}"/>
           </ac:spMkLst>
         </pc:spChg>
+        <pc:grpChg chg="add del mod">
+          <ac:chgData name="Benjamín de Jesús Cueva Niño de Guzmán" userId="56da303013910523" providerId="LiveId" clId="{532B7A48-8887-4F62-9537-0BA1FAE83637}" dt="2026-03-02T03:06:03.347" v="111" actId="165"/>
+          <ac:grpSpMkLst>
+            <pc:docMk/>
+            <pc:sldMk cId="2410626708" sldId="277"/>
+            <ac:grpSpMk id="9" creationId="{1816267B-1DC1-F5BE-9D56-6F535EFF7DE6}"/>
+          </ac:grpSpMkLst>
+        </pc:grpChg>
+        <pc:grpChg chg="add mod">
+          <ac:chgData name="Benjamín de Jesús Cueva Niño de Guzmán" userId="56da303013910523" providerId="LiveId" clId="{532B7A48-8887-4F62-9537-0BA1FAE83637}" dt="2026-03-02T03:06:24.809" v="117" actId="164"/>
+          <ac:grpSpMkLst>
+            <pc:docMk/>
+            <pc:sldMk cId="2410626708" sldId="277"/>
+            <ac:grpSpMk id="10" creationId="{63BE2411-0560-20B4-44E7-9E59B1CF57D2}"/>
+          </ac:grpSpMkLst>
+        </pc:grpChg>
         <pc:picChg chg="mod">
           <ac:chgData name="Benjamín de Jesús Cueva Niño de Guzmán" userId="56da303013910523" providerId="LiveId" clId="{532B7A48-8887-4F62-9537-0BA1FAE83637}" dt="2026-02-27T18:42:00.579" v="24"/>
           <ac:picMkLst>
@@ -264,11 +264,27 @@
         </pc:picChg>
       </pc:sldChg>
       <pc:sldChg chg="modSp mod">
-        <pc:chgData name="Benjamín de Jesús Cueva Niño de Guzmán" userId="56da303013910523" providerId="LiveId" clId="{532B7A48-8887-4F62-9537-0BA1FAE83637}" dt="2026-02-27T18:40:25.918" v="18" actId="1036"/>
+        <pc:chgData name="Benjamín de Jesús Cueva Niño de Guzmán" userId="56da303013910523" providerId="LiveId" clId="{532B7A48-8887-4F62-9537-0BA1FAE83637}" dt="2026-03-02T03:07:16.010" v="135" actId="962"/>
         <pc:sldMkLst>
           <pc:docMk/>
           <pc:sldMk cId="4084903007" sldId="278"/>
         </pc:sldMkLst>
+        <pc:spChg chg="mod">
+          <ac:chgData name="Benjamín de Jesús Cueva Niño de Guzmán" userId="56da303013910523" providerId="LiveId" clId="{532B7A48-8887-4F62-9537-0BA1FAE83637}" dt="2026-03-02T03:07:16.010" v="135" actId="962"/>
+          <ac:spMkLst>
+            <pc:docMk/>
+            <pc:sldMk cId="4084903007" sldId="278"/>
+            <ac:spMk id="11" creationId="{6A9C3E86-51AE-E415-AE46-871F1395CD67}"/>
+          </ac:spMkLst>
+        </pc:spChg>
+        <pc:graphicFrameChg chg="mod modGraphic">
+          <ac:chgData name="Benjamín de Jesús Cueva Niño de Guzmán" userId="56da303013910523" providerId="LiveId" clId="{532B7A48-8887-4F62-9537-0BA1FAE83637}" dt="2026-03-02T03:07:05.763" v="134" actId="962"/>
+          <ac:graphicFrameMkLst>
+            <pc:docMk/>
+            <pc:sldMk cId="4084903007" sldId="278"/>
+            <ac:graphicFrameMk id="27" creationId="{E2902199-03EA-D12C-1A17-39EA239AECB5}"/>
+          </ac:graphicFrameMkLst>
+        </pc:graphicFrameChg>
         <pc:picChg chg="mod">
           <ac:chgData name="Benjamín de Jesús Cueva Niño de Guzmán" userId="56da303013910523" providerId="LiveId" clId="{532B7A48-8887-4F62-9537-0BA1FAE83637}" dt="2026-02-27T18:40:25.918" v="18" actId="1036"/>
           <ac:picMkLst>
@@ -365,7 +381,7 @@
           <a:p>
             <a:fld id="{03C7FEFC-EB52-44D6-B3F1-2A7BB7FA4226}" type="datetimeFigureOut">
               <a:rPr lang="es-PE" smtClean="0"/>
-              <a:t>27/02/2026</a:t>
+              <a:t>1/03/2026</a:t>
             </a:fld>
             <a:endParaRPr lang="es-PE" dirty="0"/>
           </a:p>
@@ -530,7 +546,7 @@
           <a:p>
             <a:fld id="{64955E78-CBAA-441B-9163-D9CD5E983BDA}" type="datetimeFigureOut">
               <a:rPr lang="en-US" smtClean="0"/>
-              <a:t>2/27/2026</a:t>
+              <a:t>3/1/2026</a:t>
             </a:fld>
             <a:endParaRPr lang="en-US" dirty="0"/>
           </a:p>
@@ -929,7 +945,7 @@
           <a:p>
             <a:fld id="{5C4C4E00-4716-4B48-9D97-535E4F94A274}" type="datetimeFigureOut">
               <a:rPr lang="es-PE" smtClean="0"/>
-              <a:t>27/02/2026</a:t>
+              <a:t>1/03/2026</a:t>
             </a:fld>
             <a:endParaRPr lang="es-PE" dirty="0"/>
           </a:p>
@@ -1099,7 +1115,7 @@
           <a:p>
             <a:fld id="{5C4C4E00-4716-4B48-9D97-535E4F94A274}" type="datetimeFigureOut">
               <a:rPr lang="es-PE" smtClean="0"/>
-              <a:t>27/02/2026</a:t>
+              <a:t>1/03/2026</a:t>
             </a:fld>
             <a:endParaRPr lang="es-PE" dirty="0"/>
           </a:p>
@@ -1279,7 +1295,7 @@
           <a:p>
             <a:fld id="{5C4C4E00-4716-4B48-9D97-535E4F94A274}" type="datetimeFigureOut">
               <a:rPr lang="es-PE" smtClean="0"/>
-              <a:t>27/02/2026</a:t>
+              <a:t>1/03/2026</a:t>
             </a:fld>
             <a:endParaRPr lang="es-PE" dirty="0"/>
           </a:p>
@@ -1449,7 +1465,7 @@
           <a:p>
             <a:fld id="{5C4C4E00-4716-4B48-9D97-535E4F94A274}" type="datetimeFigureOut">
               <a:rPr lang="es-PE" smtClean="0"/>
-              <a:t>27/02/2026</a:t>
+              <a:t>1/03/2026</a:t>
             </a:fld>
             <a:endParaRPr lang="es-PE" dirty="0"/>
           </a:p>
@@ -1693,7 +1709,7 @@
           <a:p>
             <a:fld id="{5C4C4E00-4716-4B48-9D97-535E4F94A274}" type="datetimeFigureOut">
               <a:rPr lang="es-PE" smtClean="0"/>
-              <a:t>27/02/2026</a:t>
+              <a:t>1/03/2026</a:t>
             </a:fld>
             <a:endParaRPr lang="es-PE" dirty="0"/>
           </a:p>
@@ -1925,7 +1941,7 @@
           <a:p>
             <a:fld id="{5C4C4E00-4716-4B48-9D97-535E4F94A274}" type="datetimeFigureOut">
               <a:rPr lang="es-PE" smtClean="0"/>
-              <a:t>27/02/2026</a:t>
+              <a:t>1/03/2026</a:t>
             </a:fld>
             <a:endParaRPr lang="es-PE" dirty="0"/>
           </a:p>
@@ -2292,7 +2308,7 @@
           <a:p>
             <a:fld id="{5C4C4E00-4716-4B48-9D97-535E4F94A274}" type="datetimeFigureOut">
               <a:rPr lang="es-PE" smtClean="0"/>
-              <a:t>27/02/2026</a:t>
+              <a:t>1/03/2026</a:t>
             </a:fld>
             <a:endParaRPr lang="es-PE" dirty="0"/>
           </a:p>
@@ -2410,7 +2426,7 @@
           <a:p>
             <a:fld id="{5C4C4E00-4716-4B48-9D97-535E4F94A274}" type="datetimeFigureOut">
               <a:rPr lang="es-PE" smtClean="0"/>
-              <a:t>27/02/2026</a:t>
+              <a:t>1/03/2026</a:t>
             </a:fld>
             <a:endParaRPr lang="es-PE" dirty="0"/>
           </a:p>
@@ -2505,7 +2521,7 @@
           <a:p>
             <a:fld id="{5C4C4E00-4716-4B48-9D97-535E4F94A274}" type="datetimeFigureOut">
               <a:rPr lang="es-PE" smtClean="0"/>
-              <a:t>27/02/2026</a:t>
+              <a:t>1/03/2026</a:t>
             </a:fld>
             <a:endParaRPr lang="es-PE" dirty="0"/>
           </a:p>
@@ -2782,7 +2798,7 @@
           <a:p>
             <a:fld id="{5C4C4E00-4716-4B48-9D97-535E4F94A274}" type="datetimeFigureOut">
               <a:rPr lang="es-PE" smtClean="0"/>
-              <a:t>27/02/2026</a:t>
+              <a:t>1/03/2026</a:t>
             </a:fld>
             <a:endParaRPr lang="es-PE" dirty="0"/>
           </a:p>
@@ -3039,7 +3055,7 @@
           <a:p>
             <a:fld id="{5C4C4E00-4716-4B48-9D97-535E4F94A274}" type="datetimeFigureOut">
               <a:rPr lang="es-PE" smtClean="0"/>
-              <a:t>27/02/2026</a:t>
+              <a:t>1/03/2026</a:t>
             </a:fld>
             <a:endParaRPr lang="es-PE" dirty="0"/>
           </a:p>
@@ -3252,7 +3268,7 @@
           <a:p>
             <a:fld id="{5C4C4E00-4716-4B48-9D97-535E4F94A274}" type="datetimeFigureOut">
               <a:rPr lang="es-PE" smtClean="0"/>
-              <a:t>27/02/2026</a:t>
+              <a:t>1/03/2026</a:t>
             </a:fld>
             <a:endParaRPr lang="es-PE" dirty="0"/>
           </a:p>
@@ -3748,7 +3764,7 @@
         </p:nvSpPr>
         <p:spPr>
           <a:xfrm>
-            <a:off x="792012" y="2873820"/>
+            <a:off x="792012" y="2860373"/>
             <a:ext cx="5273976" cy="954107"/>
           </a:xfrm>
           <a:prstGeom prst="rect">
@@ -4014,43 +4030,254 @@
           </a:p>
         </p:txBody>
       </p:sp>
-      <p:sp>
-        <p:nvSpPr>
-          <p:cNvPr id="19" name="PH_CONTENIDO_PRINCIPAL">
+      <p:grpSp>
+        <p:nvGrpSpPr>
+          <p:cNvPr id="10" name="Grupo 9">
             <a:extLst>
               <a:ext uri="{FF2B5EF4-FFF2-40B4-BE49-F238E27FC236}">
-                <a16:creationId xmlns:a16="http://schemas.microsoft.com/office/drawing/2014/main" id="{991C4A27-894B-7257-8062-6F839343BAAD}"/>
+                <a16:creationId xmlns:a16="http://schemas.microsoft.com/office/drawing/2014/main" id="{63BE2411-0560-20B4-44E7-9E59B1CF57D2}"/>
               </a:ext>
             </a:extLst>
           </p:cNvPr>
-          <p:cNvSpPr/>
+          <p:cNvGrpSpPr/>
           <p:nvPr/>
-        </p:nvSpPr>
-        <p:spPr>
+        </p:nvGrpSpPr>
+        <p:grpSpPr>
           <a:xfrm>
-            <a:off x="570664" y="3895781"/>
-            <a:ext cx="5716673" cy="2967105"/>
+            <a:off x="570664" y="3783143"/>
+            <a:ext cx="5863899" cy="3059119"/>
+            <a:chOff x="570664" y="3783143"/>
+            <a:chExt cx="5863899" cy="3059119"/>
           </a:xfrm>
-          <a:prstGeom prst="rect">
-            <a:avLst/>
-          </a:prstGeom>
-          <a:ln>
-            <a:noFill/>
-          </a:ln>
-        </p:spPr>
-        <p:txBody>
-          <a:bodyPr vert="horz" lIns="0" tIns="0" rIns="0" bIns="0" rtlCol="0" anchor="ctr">
-            <a:noAutofit/>
-          </a:bodyPr>
-          <a:lstStyle/>
-          <a:p>
-            <a:pPr algn="ctr">
-              <a:spcBef>
-                <a:spcPts val="600"/>
-              </a:spcBef>
-            </a:pPr>
-            <a:r>
-              <a:rPr lang="es-PE" sz="1400" dirty="0">
+        </p:grpSpPr>
+        <p:sp>
+          <p:nvSpPr>
+            <p:cNvPr id="19" name="PH_CONTENIDO_PRINCIPAL">
+              <a:extLst>
+                <a:ext uri="{FF2B5EF4-FFF2-40B4-BE49-F238E27FC236}">
+                  <a16:creationId xmlns:a16="http://schemas.microsoft.com/office/drawing/2014/main" id="{991C4A27-894B-7257-8062-6F839343BAAD}"/>
+                </a:ext>
+              </a:extLst>
+            </p:cNvPr>
+            <p:cNvSpPr/>
+            <p:nvPr/>
+          </p:nvSpPr>
+          <p:spPr>
+            <a:xfrm>
+              <a:off x="570664" y="3783143"/>
+              <a:ext cx="5716673" cy="2600712"/>
+            </a:xfrm>
+            <a:prstGeom prst="rect">
+              <a:avLst/>
+            </a:prstGeom>
+            <a:ln>
+              <a:noFill/>
+            </a:ln>
+          </p:spPr>
+          <p:txBody>
+            <a:bodyPr vert="horz" lIns="0" tIns="0" rIns="0" bIns="0" rtlCol="0" anchor="t" anchorCtr="1">
+              <a:spAutoFit/>
+            </a:bodyPr>
+            <a:lstStyle/>
+            <a:p>
+              <a:pPr algn="ctr">
+                <a:spcBef>
+                  <a:spcPts val="600"/>
+                </a:spcBef>
+              </a:pPr>
+              <a:r>
+                <a:rPr lang="es-PE" sz="1400" dirty="0">
+                  <a:solidFill>
+                    <a:srgbClr val="000000"/>
+                  </a:solidFill>
+                  <a:effectLst/>
+                  <a:latin typeface="Times New Roman" panose="02020603050405020304" pitchFamily="18" charset="0"/>
+                  <a:ea typeface="Times New Roman" panose="02020603050405020304" pitchFamily="18" charset="0"/>
+                  <a:cs typeface="Times New Roman" panose="02020603050405020304" pitchFamily="18" charset="0"/>
+                </a:rPr>
+                <a:t>Por haber culminado satisfactoriamente el DIPLOMADO en:</a:t>
+              </a:r>
+            </a:p>
+            <a:p>
+              <a:pPr algn="ctr">
+                <a:spcBef>
+                  <a:spcPts val="600"/>
+                </a:spcBef>
+              </a:pPr>
+              <a:r>
+                <a:rPr lang="es-PE" sz="2800" dirty="0">
+                  <a:solidFill>
+                    <a:schemeClr val="tx2">
+                      <a:lumMod val="50000"/>
+                    </a:schemeClr>
+                  </a:solidFill>
+                  <a:latin typeface="Britannic Bold" panose="020B0903060703020204" pitchFamily="34" charset="0"/>
+                  <a:ea typeface="Times New Roman" panose="02020603050405020304" pitchFamily="18" charset="0"/>
+                  <a:cs typeface="Simplified Arabic" panose="02020603050405020304" pitchFamily="18" charset="-78"/>
+                </a:rPr>
+                <a:t>“{{TEMA_DIPLOMADO}}</a:t>
+              </a:r>
+              <a:r>
+                <a:rPr lang="es-PE" sz="2800" dirty="0">
+                  <a:solidFill>
+                    <a:schemeClr val="tx2">
+                      <a:lumMod val="50000"/>
+                    </a:schemeClr>
+                  </a:solidFill>
+                  <a:effectLst/>
+                  <a:latin typeface="Britannic Bold" panose="020B0903060703020204" pitchFamily="34" charset="0"/>
+                  <a:ea typeface="Times New Roman" panose="02020603050405020304" pitchFamily="18" charset="0"/>
+                  <a:cs typeface="Simplified Arabic" panose="02020603050405020304" pitchFamily="18" charset="-78"/>
+                </a:rPr>
+                <a:t>”</a:t>
+              </a:r>
+            </a:p>
+            <a:p>
+              <a:pPr algn="ctr">
+                <a:spcBef>
+                  <a:spcPts val="600"/>
+                </a:spcBef>
+              </a:pPr>
+              <a:r>
+                <a:rPr lang="es-PE" sz="1400" dirty="0">
+                  <a:solidFill>
+                    <a:srgbClr val="000000"/>
+                  </a:solidFill>
+                  <a:effectLst/>
+                  <a:latin typeface="Arial" panose="020B0604020202020204" pitchFamily="34" charset="0"/>
+                  <a:ea typeface="Times New Roman" panose="02020603050405020304" pitchFamily="18" charset="0"/>
+                  <a:cs typeface="Arial" panose="020B0604020202020204" pitchFamily="34" charset="0"/>
+                </a:rPr>
+                <a:t> </a:t>
+              </a:r>
+              <a:r>
+                <a:rPr lang="es-PE" sz="1400" dirty="0">
+                  <a:solidFill>
+                    <a:srgbClr val="000000"/>
+                  </a:solidFill>
+                  <a:effectLst/>
+                  <a:latin typeface="Times New Roman" panose="02020603050405020304" pitchFamily="18" charset="0"/>
+                  <a:ea typeface="Times New Roman" panose="02020603050405020304" pitchFamily="18" charset="0"/>
+                  <a:cs typeface="Times New Roman" panose="02020603050405020304" pitchFamily="18" charset="0"/>
+                </a:rPr>
+                <a:t>Realizado por el Instituto Peruano de Diplomados y Especializaciones, que mantuvo participación acad</a:t>
+              </a:r>
+              <a:r>
+                <a:rPr lang="es-PE" sz="1400" dirty="0">
+                  <a:solidFill>
+                    <a:srgbClr val="000000"/>
+                  </a:solidFill>
+                  <a:latin typeface="Times New Roman" panose="02020603050405020304" pitchFamily="18" charset="0"/>
+                  <a:ea typeface="Times New Roman" panose="02020603050405020304" pitchFamily="18" charset="0"/>
+                  <a:cs typeface="Times New Roman" panose="02020603050405020304" pitchFamily="18" charset="0"/>
+                </a:rPr>
+                <a:t>émica con la Escuela de Posgrado de la Universidad Nacional de Trujillo</a:t>
+              </a:r>
+              <a:r>
+                <a:rPr lang="es-PE" sz="1400" dirty="0">
+                  <a:solidFill>
+                    <a:srgbClr val="000000"/>
+                  </a:solidFill>
+                  <a:effectLst/>
+                  <a:latin typeface="Times New Roman" panose="02020603050405020304" pitchFamily="18" charset="0"/>
+                  <a:ea typeface="Times New Roman" panose="02020603050405020304" pitchFamily="18" charset="0"/>
+                  <a:cs typeface="Times New Roman" panose="02020603050405020304" pitchFamily="18" charset="0"/>
+                </a:rPr>
+                <a:t>, según Resolución </a:t>
+              </a:r>
+              <a:r>
+                <a:rPr lang="es-PE" sz="1400" dirty="0">
+                  <a:solidFill>
+                    <a:srgbClr val="000000"/>
+                  </a:solidFill>
+                  <a:latin typeface="Times New Roman" panose="02020603050405020304" pitchFamily="18" charset="0"/>
+                  <a:ea typeface="Times New Roman" panose="02020603050405020304" pitchFamily="18" charset="0"/>
+                  <a:cs typeface="Times New Roman" panose="02020603050405020304" pitchFamily="18" charset="0"/>
+                </a:rPr>
+                <a:t>Directoral </a:t>
+              </a:r>
+              <a:r>
+                <a:rPr lang="es-PE" sz="1400" dirty="0">
+                  <a:solidFill>
+                    <a:srgbClr val="000000"/>
+                  </a:solidFill>
+                  <a:effectLst/>
+                  <a:latin typeface="Times New Roman" panose="02020603050405020304" pitchFamily="18" charset="0"/>
+                  <a:ea typeface="Times New Roman" panose="02020603050405020304" pitchFamily="18" charset="0"/>
+                  <a:cs typeface="Times New Roman" panose="02020603050405020304" pitchFamily="18" charset="0"/>
+                </a:rPr>
+                <a:t>N° </a:t>
+              </a:r>
+              <a:r>
+                <a:rPr lang="es-PE" sz="1400" dirty="0">
+                  <a:solidFill>
+                    <a:srgbClr val="000000"/>
+                  </a:solidFill>
+                  <a:latin typeface="Times New Roman" panose="02020603050405020304" pitchFamily="18" charset="0"/>
+                  <a:ea typeface="Times New Roman" panose="02020603050405020304" pitchFamily="18" charset="0"/>
+                  <a:cs typeface="Times New Roman" panose="02020603050405020304" pitchFamily="18" charset="0"/>
+                </a:rPr>
+                <a:t>2477</a:t>
+              </a:r>
+              <a:r>
+                <a:rPr lang="es-PE" sz="1400" dirty="0">
+                  <a:solidFill>
+                    <a:srgbClr val="000000"/>
+                  </a:solidFill>
+                  <a:effectLst/>
+                  <a:latin typeface="Times New Roman" panose="02020603050405020304" pitchFamily="18" charset="0"/>
+                  <a:ea typeface="Times New Roman" panose="02020603050405020304" pitchFamily="18" charset="0"/>
+                  <a:cs typeface="Times New Roman" panose="02020603050405020304" pitchFamily="18" charset="0"/>
+                </a:rPr>
+                <a:t>-2018-EPG/UNT</a:t>
+              </a:r>
+              <a:r>
+                <a:rPr lang="es-PE" sz="1400" dirty="0">
+                  <a:solidFill>
+                    <a:srgbClr val="000000"/>
+                  </a:solidFill>
+                  <a:latin typeface="Times New Roman" panose="02020603050405020304" pitchFamily="18" charset="0"/>
+                  <a:ea typeface="Times New Roman" panose="02020603050405020304" pitchFamily="18" charset="0"/>
+                  <a:cs typeface="Times New Roman" panose="02020603050405020304" pitchFamily="18" charset="0"/>
+                </a:rPr>
+                <a:t>. R</a:t>
+              </a:r>
+              <a:r>
+                <a:rPr lang="es-PE" sz="1400" dirty="0">
+                  <a:solidFill>
+                    <a:srgbClr val="000000"/>
+                  </a:solidFill>
+                  <a:effectLst/>
+                  <a:latin typeface="Times New Roman" panose="02020603050405020304" pitchFamily="18" charset="0"/>
+                  <a:ea typeface="Times New Roman" panose="02020603050405020304" pitchFamily="18" charset="0"/>
+                  <a:cs typeface="Times New Roman" panose="02020603050405020304" pitchFamily="18" charset="0"/>
+                </a:rPr>
+                <a:t>ealizado </a:t>
+              </a:r>
+              <a:r>
+                <a:rPr lang="es-PE" sz="1400" dirty="0">
+                  <a:solidFill>
+                    <a:srgbClr val="000000"/>
+                  </a:solidFill>
+                  <a:latin typeface="Times New Roman" panose="02020603050405020304" pitchFamily="18" charset="0"/>
+                  <a:ea typeface="Times New Roman" panose="02020603050405020304" pitchFamily="18" charset="0"/>
+                  <a:cs typeface="Times New Roman" panose="02020603050405020304" pitchFamily="18" charset="0"/>
+                </a:rPr>
+                <a:t>del {{FECHA_INICIO}} al {{FECHA_FIN}}</a:t>
+              </a:r>
+              <a:r>
+                <a:rPr lang="es-PE" sz="1400" dirty="0">
+                  <a:solidFill>
+                    <a:srgbClr val="000000"/>
+                  </a:solidFill>
+                  <a:effectLst/>
+                  <a:latin typeface="Times New Roman" panose="02020603050405020304" pitchFamily="18" charset="0"/>
+                  <a:ea typeface="Times New Roman" panose="02020603050405020304" pitchFamily="18" charset="0"/>
+                  <a:cs typeface="Times New Roman" panose="02020603050405020304" pitchFamily="18" charset="0"/>
+                </a:rPr>
+                <a:t>, con una duración de {{HORAS_ACADEMICAS}} horas académicas, equivalente a {{CREDITOS_ACADEMICOS}} créditos académicos.</a:t>
+              </a:r>
+              <a:endParaRPr lang="es-PE" sz="800" dirty="0">
                 <a:solidFill>
                   <a:srgbClr val="000000"/>
                 </a:solidFill>
@@ -4058,273 +4285,83 @@
                 <a:latin typeface="Times New Roman" panose="02020603050405020304" pitchFamily="18" charset="0"/>
                 <a:ea typeface="Times New Roman" panose="02020603050405020304" pitchFamily="18" charset="0"/>
                 <a:cs typeface="Times New Roman" panose="02020603050405020304" pitchFamily="18" charset="0"/>
-              </a:rPr>
-              <a:t>Por haber culminado satisfactoriamente el DIPLOMADO en:</a:t>
-            </a:r>
-          </a:p>
-          <a:p>
-            <a:pPr algn="ctr">
-              <a:spcBef>
-                <a:spcPts val="600"/>
-              </a:spcBef>
-            </a:pPr>
-            <a:r>
-              <a:rPr lang="es-PE" sz="2800" dirty="0">
-                <a:solidFill>
-                  <a:schemeClr val="tx2">
-                    <a:lumMod val="50000"/>
-                  </a:schemeClr>
-                </a:solidFill>
-                <a:latin typeface="Britannic Bold" panose="020B0903060703020204" pitchFamily="34" charset="0"/>
-                <a:ea typeface="Times New Roman" panose="02020603050405020304" pitchFamily="18" charset="0"/>
-                <a:cs typeface="Simplified Arabic" panose="02020603050405020304" pitchFamily="18" charset="-78"/>
-              </a:rPr>
-              <a:t>“{{TEMA_DIPLOMADO}}</a:t>
-            </a:r>
-            <a:r>
-              <a:rPr lang="es-PE" sz="2800" dirty="0">
-                <a:solidFill>
-                  <a:schemeClr val="tx2">
-                    <a:lumMod val="50000"/>
-                  </a:schemeClr>
-                </a:solidFill>
-                <a:effectLst/>
-                <a:latin typeface="Britannic Bold" panose="020B0903060703020204" pitchFamily="34" charset="0"/>
-                <a:ea typeface="Times New Roman" panose="02020603050405020304" pitchFamily="18" charset="0"/>
-                <a:cs typeface="Simplified Arabic" panose="02020603050405020304" pitchFamily="18" charset="-78"/>
-              </a:rPr>
-              <a:t>”</a:t>
-            </a:r>
-          </a:p>
-          <a:p>
-            <a:pPr algn="ctr">
-              <a:spcBef>
-                <a:spcPts val="600"/>
-              </a:spcBef>
-            </a:pPr>
-            <a:r>
-              <a:rPr lang="es-PE" sz="1400" dirty="0">
-                <a:solidFill>
-                  <a:srgbClr val="000000"/>
-                </a:solidFill>
-                <a:effectLst/>
-                <a:latin typeface="Arial" panose="020B0604020202020204" pitchFamily="34" charset="0"/>
-                <a:ea typeface="Times New Roman" panose="02020603050405020304" pitchFamily="18" charset="0"/>
-                <a:cs typeface="Arial" panose="020B0604020202020204" pitchFamily="34" charset="0"/>
-              </a:rPr>
-              <a:t> </a:t>
-            </a:r>
-            <a:r>
-              <a:rPr lang="es-PE" sz="1400" dirty="0">
-                <a:solidFill>
-                  <a:srgbClr val="000000"/>
-                </a:solidFill>
-                <a:effectLst/>
-                <a:latin typeface="Times New Roman" panose="02020603050405020304" pitchFamily="18" charset="0"/>
-                <a:ea typeface="Times New Roman" panose="02020603050405020304" pitchFamily="18" charset="0"/>
-                <a:cs typeface="Times New Roman" panose="02020603050405020304" pitchFamily="18" charset="0"/>
-              </a:rPr>
-              <a:t>Realizado por el Instituto Peruano de Diplomados y Especializaciones, que mantuvo participación acad</a:t>
-            </a:r>
-            <a:r>
-              <a:rPr lang="es-PE" sz="1400" dirty="0">
-                <a:solidFill>
-                  <a:srgbClr val="000000"/>
-                </a:solidFill>
-                <a:latin typeface="Times New Roman" panose="02020603050405020304" pitchFamily="18" charset="0"/>
-                <a:ea typeface="Times New Roman" panose="02020603050405020304" pitchFamily="18" charset="0"/>
-                <a:cs typeface="Times New Roman" panose="02020603050405020304" pitchFamily="18" charset="0"/>
-              </a:rPr>
-              <a:t>émica con la Escuela de Posgrado de la Universidad Nacional de Trujillo</a:t>
-            </a:r>
-            <a:r>
-              <a:rPr lang="es-PE" sz="1400" dirty="0">
-                <a:solidFill>
-                  <a:srgbClr val="000000"/>
-                </a:solidFill>
-                <a:effectLst/>
-                <a:latin typeface="Times New Roman" panose="02020603050405020304" pitchFamily="18" charset="0"/>
-                <a:ea typeface="Times New Roman" panose="02020603050405020304" pitchFamily="18" charset="0"/>
-                <a:cs typeface="Times New Roman" panose="02020603050405020304" pitchFamily="18" charset="0"/>
-              </a:rPr>
-              <a:t>, según Resolución </a:t>
-            </a:r>
-            <a:r>
-              <a:rPr lang="es-PE" sz="1400" dirty="0">
-                <a:solidFill>
-                  <a:srgbClr val="000000"/>
-                </a:solidFill>
-                <a:latin typeface="Times New Roman" panose="02020603050405020304" pitchFamily="18" charset="0"/>
-                <a:ea typeface="Times New Roman" panose="02020603050405020304" pitchFamily="18" charset="0"/>
-                <a:cs typeface="Times New Roman" panose="02020603050405020304" pitchFamily="18" charset="0"/>
-              </a:rPr>
-              <a:t>Directoral </a:t>
-            </a:r>
-            <a:r>
-              <a:rPr lang="es-PE" sz="1400" dirty="0">
-                <a:solidFill>
-                  <a:srgbClr val="000000"/>
-                </a:solidFill>
-                <a:effectLst/>
-                <a:latin typeface="Times New Roman" panose="02020603050405020304" pitchFamily="18" charset="0"/>
-                <a:ea typeface="Times New Roman" panose="02020603050405020304" pitchFamily="18" charset="0"/>
-                <a:cs typeface="Times New Roman" panose="02020603050405020304" pitchFamily="18" charset="0"/>
-              </a:rPr>
-              <a:t>N° </a:t>
-            </a:r>
-            <a:r>
-              <a:rPr lang="es-PE" sz="1400" dirty="0">
-                <a:solidFill>
-                  <a:srgbClr val="000000"/>
-                </a:solidFill>
-                <a:latin typeface="Times New Roman" panose="02020603050405020304" pitchFamily="18" charset="0"/>
-                <a:ea typeface="Times New Roman" panose="02020603050405020304" pitchFamily="18" charset="0"/>
-                <a:cs typeface="Times New Roman" panose="02020603050405020304" pitchFamily="18" charset="0"/>
-              </a:rPr>
-              <a:t>2477</a:t>
-            </a:r>
-            <a:r>
-              <a:rPr lang="es-PE" sz="1400" dirty="0">
-                <a:solidFill>
-                  <a:srgbClr val="000000"/>
-                </a:solidFill>
-                <a:effectLst/>
-                <a:latin typeface="Times New Roman" panose="02020603050405020304" pitchFamily="18" charset="0"/>
-                <a:ea typeface="Times New Roman" panose="02020603050405020304" pitchFamily="18" charset="0"/>
-                <a:cs typeface="Times New Roman" panose="02020603050405020304" pitchFamily="18" charset="0"/>
-              </a:rPr>
-              <a:t>-2018-EPG/UNT</a:t>
-            </a:r>
-            <a:r>
-              <a:rPr lang="es-PE" sz="1400" dirty="0">
-                <a:solidFill>
-                  <a:srgbClr val="000000"/>
-                </a:solidFill>
-                <a:latin typeface="Times New Roman" panose="02020603050405020304" pitchFamily="18" charset="0"/>
-                <a:ea typeface="Times New Roman" panose="02020603050405020304" pitchFamily="18" charset="0"/>
-                <a:cs typeface="Times New Roman" panose="02020603050405020304" pitchFamily="18" charset="0"/>
-              </a:rPr>
-              <a:t>. R</a:t>
-            </a:r>
-            <a:r>
-              <a:rPr lang="es-PE" sz="1400" dirty="0">
-                <a:solidFill>
-                  <a:srgbClr val="000000"/>
-                </a:solidFill>
-                <a:effectLst/>
-                <a:latin typeface="Times New Roman" panose="02020603050405020304" pitchFamily="18" charset="0"/>
-                <a:ea typeface="Times New Roman" panose="02020603050405020304" pitchFamily="18" charset="0"/>
-                <a:cs typeface="Times New Roman" panose="02020603050405020304" pitchFamily="18" charset="0"/>
-              </a:rPr>
-              <a:t>ealizado </a:t>
-            </a:r>
-            <a:r>
-              <a:rPr lang="es-PE" sz="1400" dirty="0">
-                <a:solidFill>
-                  <a:srgbClr val="000000"/>
-                </a:solidFill>
-                <a:latin typeface="Times New Roman" panose="02020603050405020304" pitchFamily="18" charset="0"/>
-                <a:ea typeface="Times New Roman" panose="02020603050405020304" pitchFamily="18" charset="0"/>
-                <a:cs typeface="Times New Roman" panose="02020603050405020304" pitchFamily="18" charset="0"/>
-              </a:rPr>
-              <a:t>del {{FECHA_INICIO}} al {{FECHA_FIN}}</a:t>
-            </a:r>
-            <a:r>
-              <a:rPr lang="es-PE" sz="1400" dirty="0">
-                <a:solidFill>
-                  <a:srgbClr val="000000"/>
-                </a:solidFill>
-                <a:effectLst/>
-                <a:latin typeface="Times New Roman" panose="02020603050405020304" pitchFamily="18" charset="0"/>
-                <a:ea typeface="Times New Roman" panose="02020603050405020304" pitchFamily="18" charset="0"/>
-                <a:cs typeface="Times New Roman" panose="02020603050405020304" pitchFamily="18" charset="0"/>
-              </a:rPr>
-              <a:t>, con una duración de {{HORAS_ACADEMICAS}} horas académicas, equivalente a {{CREDITOS_ACADEMICOS}} créditos académicos.</a:t>
-            </a:r>
-            <a:endParaRPr lang="es-PE" sz="800" dirty="0">
-              <a:solidFill>
-                <a:srgbClr val="000000"/>
-              </a:solidFill>
-              <a:effectLst/>
-              <a:latin typeface="Times New Roman" panose="02020603050405020304" pitchFamily="18" charset="0"/>
-              <a:ea typeface="Times New Roman" panose="02020603050405020304" pitchFamily="18" charset="0"/>
-              <a:cs typeface="Times New Roman" panose="02020603050405020304" pitchFamily="18" charset="0"/>
-            </a:endParaRPr>
-          </a:p>
-          <a:p>
-            <a:pPr algn="ctr">
-              <a:spcBef>
-                <a:spcPts val="600"/>
-              </a:spcBef>
-            </a:pPr>
-            <a:r>
-              <a:rPr lang="es-PE" sz="1400" dirty="0">
-                <a:latin typeface="Times New Roman" panose="02020603050405020304" pitchFamily="18" charset="0"/>
-                <a:ea typeface="Cambria Math" panose="02040503050406030204" pitchFamily="18" charset="0"/>
-                <a:cs typeface="Times New Roman" panose="02020603050405020304" pitchFamily="18" charset="0"/>
-              </a:rPr>
-              <a:t>Por tanto, se expide el presente {{MODELO_MINUSCULA}} otorgándole los privilegios y consideraciones que le corresponden.</a:t>
-            </a:r>
-          </a:p>
-        </p:txBody>
-      </p:sp>
-      <p:sp>
-        <p:nvSpPr>
-          <p:cNvPr id="7" name="PH_FECHA_EMISION_LARGA">
-            <a:extLst>
-              <a:ext uri="{FF2B5EF4-FFF2-40B4-BE49-F238E27FC236}">
-                <a16:creationId xmlns:a16="http://schemas.microsoft.com/office/drawing/2014/main" id="{F36D8880-B179-580E-0319-C4E9487E072A}"/>
-              </a:ext>
-            </a:extLst>
-          </p:cNvPr>
-          <p:cNvSpPr/>
-          <p:nvPr/>
-        </p:nvSpPr>
-        <p:spPr>
-          <a:xfrm>
-            <a:off x="3075083" y="6911945"/>
-            <a:ext cx="3359480" cy="320280"/>
-          </a:xfrm>
-          <a:prstGeom prst="rect">
-            <a:avLst/>
-          </a:prstGeom>
-        </p:spPr>
-        <p:txBody>
-          <a:bodyPr wrap="square">
-            <a:spAutoFit/>
-          </a:bodyPr>
-          <a:lstStyle/>
-          <a:p>
-            <a:pPr lvl="0" algn="r">
-              <a:lnSpc>
-                <a:spcPct val="115000"/>
-              </a:lnSpc>
-              <a:spcBef>
-                <a:spcPts val="59"/>
-              </a:spcBef>
-            </a:pPr>
-            <a:r>
-              <a:rPr lang="es-PE" sz="1400" dirty="0">
+              </a:endParaRPr>
+            </a:p>
+            <a:p>
+              <a:pPr algn="ctr">
+                <a:spcBef>
+                  <a:spcPts val="600"/>
+                </a:spcBef>
+              </a:pPr>
+              <a:r>
+                <a:rPr lang="es-PE" sz="1400" dirty="0">
+                  <a:latin typeface="Times New Roman" panose="02020603050405020304" pitchFamily="18" charset="0"/>
+                  <a:ea typeface="Cambria Math" panose="02040503050406030204" pitchFamily="18" charset="0"/>
+                  <a:cs typeface="Times New Roman" panose="02020603050405020304" pitchFamily="18" charset="0"/>
+                </a:rPr>
+                <a:t>Por tanto, se expide el presente {{MODELO_MINUSCULA}} otorgándole los privilegios y consideraciones que le corresponden.</a:t>
+              </a:r>
+            </a:p>
+          </p:txBody>
+        </p:sp>
+        <p:sp>
+          <p:nvSpPr>
+            <p:cNvPr id="7" name="PH_FECHA_EMISION_LARGA">
+              <a:extLst>
+                <a:ext uri="{FF2B5EF4-FFF2-40B4-BE49-F238E27FC236}">
+                  <a16:creationId xmlns:a16="http://schemas.microsoft.com/office/drawing/2014/main" id="{F36D8880-B179-580E-0319-C4E9487E072A}"/>
+                </a:ext>
+              </a:extLst>
+            </p:cNvPr>
+            <p:cNvSpPr/>
+            <p:nvPr/>
+          </p:nvSpPr>
+          <p:spPr>
+            <a:xfrm>
+              <a:off x="3075083" y="6521982"/>
+              <a:ext cx="3359480" cy="320280"/>
+            </a:xfrm>
+            <a:prstGeom prst="rect">
+              <a:avLst/>
+            </a:prstGeom>
+          </p:spPr>
+          <p:txBody>
+            <a:bodyPr wrap="square">
+              <a:spAutoFit/>
+            </a:bodyPr>
+            <a:lstStyle/>
+            <a:p>
+              <a:pPr lvl="0" algn="r">
+                <a:lnSpc>
+                  <a:spcPct val="115000"/>
+                </a:lnSpc>
+                <a:spcBef>
+                  <a:spcPts val="59"/>
+                </a:spcBef>
+              </a:pPr>
+              <a:r>
+                <a:rPr lang="es-PE" sz="1400" dirty="0">
+                  <a:solidFill>
+                    <a:prstClr val="black"/>
+                  </a:solidFill>
+                  <a:latin typeface="Times New Roman" panose="02020603050405020304" pitchFamily="18" charset="0"/>
+                  <a:ea typeface="Cambria Math" panose="02040503050406030204" pitchFamily="18" charset="0"/>
+                  <a:cs typeface="Times New Roman" panose="02020603050405020304" pitchFamily="18" charset="0"/>
+                </a:rPr>
+                <a:t>Trujillo, {{FECHA_EMISION_LARGA}}</a:t>
+              </a:r>
+              <a:endParaRPr lang="en-US" sz="1400" dirty="0">
                 <a:solidFill>
                   <a:prstClr val="black"/>
                 </a:solidFill>
                 <a:latin typeface="Times New Roman" panose="02020603050405020304" pitchFamily="18" charset="0"/>
                 <a:ea typeface="Cambria Math" panose="02040503050406030204" pitchFamily="18" charset="0"/>
                 <a:cs typeface="Times New Roman" panose="02020603050405020304" pitchFamily="18" charset="0"/>
-              </a:rPr>
-              <a:t>Trujillo, {{FECHA_EMISION_LARGA}}</a:t>
-            </a:r>
-            <a:endParaRPr lang="en-US" sz="1400" dirty="0">
-              <a:solidFill>
-                <a:prstClr val="black"/>
-              </a:solidFill>
-              <a:latin typeface="Times New Roman" panose="02020603050405020304" pitchFamily="18" charset="0"/>
-              <a:ea typeface="Cambria Math" panose="02040503050406030204" pitchFamily="18" charset="0"/>
-              <a:cs typeface="Times New Roman" panose="02020603050405020304" pitchFamily="18" charset="0"/>
-            </a:endParaRPr>
-          </a:p>
-        </p:txBody>
-      </p:sp>
+              </a:endParaRPr>
+            </a:p>
+          </p:txBody>
+        </p:sp>
+      </p:grpSp>
       <p:pic>
         <p:nvPicPr>
           <p:cNvPr id="4" name="Imagen 3">
@@ -4961,7 +4998,7 @@
       </p:pic>
       <p:sp>
         <p:nvSpPr>
-          <p:cNvPr id="11" name="CuadroTexto 10">
+          <p:cNvPr id="11" name="PH_TEMA">
             <a:extLst>
               <a:ext uri="{FF2B5EF4-FFF2-40B4-BE49-F238E27FC236}">
                 <a16:creationId xmlns:a16="http://schemas.microsoft.com/office/drawing/2014/main" id="{6A9C3E86-51AE-E415-AE46-871F1395CD67}"/>
@@ -5400,7 +5437,7 @@
       </p:sp>
       <p:graphicFrame>
         <p:nvGraphicFramePr>
-          <p:cNvPr id="27" name="Tabla 26">
+          <p:cNvPr id="27" name="PH_TABLA">
             <a:extLst>
               <a:ext uri="{FF2B5EF4-FFF2-40B4-BE49-F238E27FC236}">
                 <a16:creationId xmlns:a16="http://schemas.microsoft.com/office/drawing/2014/main" id="{E2902199-03EA-D12C-1A17-39EA239AECB5}"/>
@@ -5413,13 +5450,13 @@
           <p:nvPr>
             <p:extLst>
               <p:ext uri="{D42A27DB-BD31-4B8C-83A1-F6EECF244321}">
-                <p14:modId xmlns:p14="http://schemas.microsoft.com/office/powerpoint/2010/main" val="3475725575"/>
+                <p14:modId xmlns:p14="http://schemas.microsoft.com/office/powerpoint/2010/main" val="1848507718"/>
               </p:ext>
             </p:extLst>
           </p:nvPr>
         </p:nvGraphicFramePr>
         <p:xfrm>
-          <a:off x="745017" y="3109557"/>
+          <a:off x="745017" y="2921299"/>
           <a:ext cx="5367967" cy="4710006"/>
         </p:xfrm>
         <a:graphic>
@@ -5598,7 +5635,7 @@
                     <a:p>
                       <a:pPr algn="ctr"/>
                       <a:r>
-                        <a:rPr lang="es-ES" sz="1000" dirty="0"/>
+                        <a:rPr lang="es-ES" sz="900" dirty="0"/>
                         <a:t>{{MODULO_1}}</a:t>
                       </a:r>
                     </a:p>
@@ -5691,7 +5728,7 @@
                         <a:defRPr/>
                       </a:pPr>
                       <a:r>
-                        <a:rPr lang="es-ES" sz="1000" dirty="0"/>
+                        <a:rPr lang="es-ES" sz="900" dirty="0"/>
                         <a:t>{{MODULO_2}}</a:t>
                       </a:r>
                     </a:p>
@@ -5768,7 +5805,7 @@
                         <a:defRPr/>
                       </a:pPr>
                       <a:r>
-                        <a:rPr lang="es-ES" sz="1000" dirty="0"/>
+                        <a:rPr lang="es-ES" sz="900" dirty="0"/>
                         <a:t>{{MODULO_3}}</a:t>
                       </a:r>
                     </a:p>
@@ -5861,10 +5898,10 @@
                         <a:defRPr/>
                       </a:pPr>
                       <a:r>
-                        <a:rPr lang="es-ES" sz="1000" dirty="0"/>
+                        <a:rPr lang="es-ES" sz="900" dirty="0"/>
                         <a:t>{{MODULO_4}}</a:t>
                       </a:r>
-                      <a:endParaRPr lang="es-ES" sz="1000" b="0" i="0" kern="1200" dirty="0">
+                      <a:endParaRPr lang="es-ES" sz="900" b="0" i="0" kern="1200" dirty="0">
                         <a:solidFill>
                           <a:schemeClr val="dk1"/>
                         </a:solidFill>
@@ -5963,7 +6000,7 @@
                         <a:defRPr/>
                       </a:pPr>
                       <a:r>
-                        <a:rPr lang="es-ES" sz="1000" dirty="0"/>
+                        <a:rPr lang="es-ES" sz="900" dirty="0"/>
                         <a:t>{{MODULO_5}}</a:t>
                       </a:r>
                     </a:p>
@@ -6059,7 +6096,7 @@
                         <a:defRPr/>
                       </a:pPr>
                       <a:r>
-                        <a:rPr lang="es-ES" sz="1000" dirty="0"/>
+                        <a:rPr lang="es-ES" sz="900" dirty="0"/>
                         <a:t>{{MODULO_6}}</a:t>
                       </a:r>
                     </a:p>
@@ -6155,7 +6192,7 @@
                         <a:defRPr/>
                       </a:pPr>
                       <a:r>
-                        <a:rPr lang="es-ES" sz="1000" dirty="0"/>
+                        <a:rPr lang="es-ES" sz="900" dirty="0"/>
                         <a:t>{{MODULO_7}}</a:t>
                       </a:r>
                     </a:p>
@@ -6251,7 +6288,7 @@
                         <a:defRPr/>
                       </a:pPr>
                       <a:r>
-                        <a:rPr lang="es-ES" sz="1000" dirty="0"/>
+                        <a:rPr lang="es-ES" sz="900" dirty="0"/>
                         <a:t>{{MODULO_8}}</a:t>
                       </a:r>
                     </a:p>

--- a/app/templates/universidad_2qrs/plantilla_diplomado.pptx
+++ b/app/templates/universidad_2qrs/plantilla_diplomado.pptx
@@ -119,31 +119,23 @@
 </p:presentation>
 </file>
 
-<file path=ppt/revisionInfo.xml><?xml version="1.0" encoding="utf-8"?>
-<p1510:revInfo xmlns:a="http://schemas.openxmlformats.org/drawingml/2006/main" xmlns:r="http://schemas.openxmlformats.org/officeDocument/2006/relationships" xmlns:p1510="http://schemas.microsoft.com/office/powerpoint/2015/10/main">
-  <p1510:revLst>
-    <p1510:client id="{2ECDD09E-9648-4DA4-91F7-7D06BC5A5820}" v="12" dt="2026-03-02T03:07:16.010"/>
-  </p1510:revLst>
-</p1510:revInfo>
-</file>
-
 <file path=ppt/changesInfos/changesInfo1.xml><?xml version="1.0" encoding="utf-8"?>
 <pc:chgInfo xmlns:a="http://schemas.openxmlformats.org/drawingml/2006/main" xmlns:r="http://schemas.openxmlformats.org/officeDocument/2006/relationships" xmlns:ac="http://schemas.microsoft.com/office/drawing/2013/main/command" xmlns:pc="http://schemas.microsoft.com/office/powerpoint/2013/main/command">
   <pc:docChgLst>
     <pc:chgData name="Benjamín de Jesús Cueva Niño de Guzmán" userId="56da303013910523" providerId="LiveId" clId="{532B7A48-8887-4F62-9537-0BA1FAE83637}"/>
     <pc:docChg chg="undo custSel delSld modSld">
-      <pc:chgData name="Benjamín de Jesús Cueva Niño de Guzmán" userId="56da303013910523" providerId="LiveId" clId="{532B7A48-8887-4F62-9537-0BA1FAE83637}" dt="2026-03-02T03:07:16.010" v="135" actId="962"/>
+      <pc:chgData name="Benjamín de Jesús Cueva Niño de Guzmán" userId="56da303013910523" providerId="LiveId" clId="{532B7A48-8887-4F62-9537-0BA1FAE83637}" dt="2026-03-05T18:58:35.798" v="208" actId="20577"/>
       <pc:docMkLst>
         <pc:docMk/>
       </pc:docMkLst>
       <pc:sldChg chg="addSp delSp modSp mod">
-        <pc:chgData name="Benjamín de Jesús Cueva Niño de Guzmán" userId="56da303013910523" providerId="LiveId" clId="{532B7A48-8887-4F62-9537-0BA1FAE83637}" dt="2026-03-02T03:06:24.809" v="117" actId="164"/>
+        <pc:chgData name="Benjamín de Jesús Cueva Niño de Guzmán" userId="56da303013910523" providerId="LiveId" clId="{532B7A48-8887-4F62-9537-0BA1FAE83637}" dt="2026-03-05T18:29:19.395" v="164" actId="1035"/>
         <pc:sldMkLst>
           <pc:docMk/>
           <pc:sldMk cId="2410626708" sldId="277"/>
         </pc:sldMkLst>
         <pc:spChg chg="mod modVis">
-          <ac:chgData name="Benjamín de Jesús Cueva Niño de Guzmán" userId="56da303013910523" providerId="LiveId" clId="{532B7A48-8887-4F62-9537-0BA1FAE83637}" dt="2026-03-02T03:05:50.881" v="110" actId="1036"/>
+          <ac:chgData name="Benjamín de Jesús Cueva Niño de Guzmán" userId="56da303013910523" providerId="LiveId" clId="{532B7A48-8887-4F62-9537-0BA1FAE83637}" dt="2026-03-03T01:36:52.951" v="157" actId="1035"/>
           <ac:spMkLst>
             <pc:docMk/>
             <pc:sldMk cId="2410626708" sldId="277"/>
@@ -166,14 +158,6 @@
             <ac:spMk id="6" creationId="{D3A49D29-7E2E-6432-7436-A1B8CDE0CBD2}"/>
           </ac:spMkLst>
         </pc:spChg>
-        <pc:spChg chg="mod topLvl">
-          <ac:chgData name="Benjamín de Jesús Cueva Niño de Guzmán" userId="56da303013910523" providerId="LiveId" clId="{532B7A48-8887-4F62-9537-0BA1FAE83637}" dt="2026-03-02T03:06:24.809" v="117" actId="164"/>
-          <ac:spMkLst>
-            <pc:docMk/>
-            <pc:sldMk cId="2410626708" sldId="277"/>
-            <ac:spMk id="7" creationId="{F36D8880-B179-580E-0319-C4E9487E072A}"/>
-          </ac:spMkLst>
-        </pc:spChg>
         <pc:spChg chg="mod">
           <ac:chgData name="Benjamín de Jesús Cueva Niño de Guzmán" userId="56da303013910523" providerId="LiveId" clId="{532B7A48-8887-4F62-9537-0BA1FAE83637}" dt="2026-02-27T18:42:59.090" v="31" actId="962"/>
           <ac:spMkLst>
@@ -182,46 +166,30 @@
             <ac:spMk id="17" creationId="{FC88E61B-8665-F7AA-FB48-82299D51180D}"/>
           </ac:spMkLst>
         </pc:spChg>
-        <pc:spChg chg="mod topLvl">
-          <ac:chgData name="Benjamín de Jesús Cueva Niño de Guzmán" userId="56da303013910523" providerId="LiveId" clId="{532B7A48-8887-4F62-9537-0BA1FAE83637}" dt="2026-03-02T03:06:24.809" v="117" actId="164"/>
+        <pc:spChg chg="mod ord topLvl">
+          <ac:chgData name="Benjamín de Jesús Cueva Niño de Guzmán" userId="56da303013910523" providerId="LiveId" clId="{532B7A48-8887-4F62-9537-0BA1FAE83637}" dt="2026-03-05T18:29:19.395" v="164" actId="1035"/>
           <ac:spMkLst>
             <pc:docMk/>
             <pc:sldMk cId="2410626708" sldId="277"/>
             <ac:spMk id="19" creationId="{991C4A27-894B-7257-8062-6F839343BAAD}"/>
           </ac:spMkLst>
         </pc:spChg>
-        <pc:spChg chg="mod">
-          <ac:chgData name="Benjamín de Jesús Cueva Niño de Guzmán" userId="56da303013910523" providerId="LiveId" clId="{532B7A48-8887-4F62-9537-0BA1FAE83637}" dt="2026-02-27T18:42:02.061" v="25"/>
+        <pc:spChg chg="mod ord">
+          <ac:chgData name="Benjamín de Jesús Cueva Niño de Guzmán" userId="56da303013910523" providerId="LiveId" clId="{532B7A48-8887-4F62-9537-0BA1FAE83637}" dt="2026-03-03T01:37:06.668" v="161" actId="167"/>
           <ac:spMkLst>
             <pc:docMk/>
             <pc:sldMk cId="2410626708" sldId="277"/>
             <ac:spMk id="22" creationId="{D6CB106F-7EC0-002A-CEBE-0064B169D038}"/>
           </ac:spMkLst>
         </pc:spChg>
-        <pc:spChg chg="mod">
-          <ac:chgData name="Benjamín de Jesús Cueva Niño de Guzmán" userId="56da303013910523" providerId="LiveId" clId="{532B7A48-8887-4F62-9537-0BA1FAE83637}" dt="2026-02-27T18:42:03.214" v="26"/>
+        <pc:spChg chg="mod ord">
+          <ac:chgData name="Benjamín de Jesús Cueva Niño de Guzmán" userId="56da303013910523" providerId="LiveId" clId="{532B7A48-8887-4F62-9537-0BA1FAE83637}" dt="2026-03-03T01:37:06.668" v="161" actId="167"/>
           <ac:spMkLst>
             <pc:docMk/>
             <pc:sldMk cId="2410626708" sldId="277"/>
             <ac:spMk id="23" creationId="{D962536F-CB9F-1938-8F28-5D8C8FE943C7}"/>
           </ac:spMkLst>
         </pc:spChg>
-        <pc:grpChg chg="add del mod">
-          <ac:chgData name="Benjamín de Jesús Cueva Niño de Guzmán" userId="56da303013910523" providerId="LiveId" clId="{532B7A48-8887-4F62-9537-0BA1FAE83637}" dt="2026-03-02T03:06:03.347" v="111" actId="165"/>
-          <ac:grpSpMkLst>
-            <pc:docMk/>
-            <pc:sldMk cId="2410626708" sldId="277"/>
-            <ac:grpSpMk id="9" creationId="{1816267B-1DC1-F5BE-9D56-6F535EFF7DE6}"/>
-          </ac:grpSpMkLst>
-        </pc:grpChg>
-        <pc:grpChg chg="add mod">
-          <ac:chgData name="Benjamín de Jesús Cueva Niño de Guzmán" userId="56da303013910523" providerId="LiveId" clId="{532B7A48-8887-4F62-9537-0BA1FAE83637}" dt="2026-03-02T03:06:24.809" v="117" actId="164"/>
-          <ac:grpSpMkLst>
-            <pc:docMk/>
-            <pc:sldMk cId="2410626708" sldId="277"/>
-            <ac:grpSpMk id="10" creationId="{63BE2411-0560-20B4-44E7-9E59B1CF57D2}"/>
-          </ac:grpSpMkLst>
-        </pc:grpChg>
         <pc:picChg chg="mod">
           <ac:chgData name="Benjamín de Jesús Cueva Niño de Guzmán" userId="56da303013910523" providerId="LiveId" clId="{532B7A48-8887-4F62-9537-0BA1FAE83637}" dt="2026-02-27T18:42:00.579" v="24"/>
           <ac:picMkLst>
@@ -238,8 +206,8 @@
             <ac:picMk id="5" creationId="{E8D55156-67B8-4336-A410-DB422B06644F}"/>
           </ac:picMkLst>
         </pc:picChg>
-        <pc:picChg chg="mod">
-          <ac:chgData name="Benjamín de Jesús Cueva Niño de Guzmán" userId="56da303013910523" providerId="LiveId" clId="{532B7A48-8887-4F62-9537-0BA1FAE83637}" dt="2026-02-27T18:42:06.294" v="27"/>
+        <pc:picChg chg="mod ord">
+          <ac:chgData name="Benjamín de Jesús Cueva Niño de Guzmán" userId="56da303013910523" providerId="LiveId" clId="{532B7A48-8887-4F62-9537-0BA1FAE83637}" dt="2026-03-03T01:37:03.537" v="160" actId="167"/>
           <ac:picMkLst>
             <pc:docMk/>
             <pc:sldMk cId="2410626708" sldId="277"/>
@@ -264,7 +232,7 @@
         </pc:picChg>
       </pc:sldChg>
       <pc:sldChg chg="modSp mod">
-        <pc:chgData name="Benjamín de Jesús Cueva Niño de Guzmán" userId="56da303013910523" providerId="LiveId" clId="{532B7A48-8887-4F62-9537-0BA1FAE83637}" dt="2026-03-02T03:07:16.010" v="135" actId="962"/>
+        <pc:chgData name="Benjamín de Jesús Cueva Niño de Guzmán" userId="56da303013910523" providerId="LiveId" clId="{532B7A48-8887-4F62-9537-0BA1FAE83637}" dt="2026-03-05T18:58:35.798" v="208" actId="20577"/>
         <pc:sldMkLst>
           <pc:docMk/>
           <pc:sldMk cId="4084903007" sldId="278"/>
@@ -275,6 +243,14 @@
             <pc:docMk/>
             <pc:sldMk cId="4084903007" sldId="278"/>
             <ac:spMk id="11" creationId="{6A9C3E86-51AE-E415-AE46-871F1395CD67}"/>
+          </ac:spMkLst>
+        </pc:spChg>
+        <pc:spChg chg="mod">
+          <ac:chgData name="Benjamín de Jesús Cueva Niño de Guzmán" userId="56da303013910523" providerId="LiveId" clId="{532B7A48-8887-4F62-9537-0BA1FAE83637}" dt="2026-03-05T18:58:35.798" v="208" actId="20577"/>
+          <ac:spMkLst>
+            <pc:docMk/>
+            <pc:sldMk cId="4084903007" sldId="278"/>
+            <ac:spMk id="25" creationId="{1BD7C6F0-73B6-617B-0B21-594BAED95EBF}"/>
           </ac:spMkLst>
         </pc:spChg>
         <pc:graphicFrameChg chg="mod modGraphic">
@@ -381,7 +357,7 @@
           <a:p>
             <a:fld id="{03C7FEFC-EB52-44D6-B3F1-2A7BB7FA4226}" type="datetimeFigureOut">
               <a:rPr lang="es-PE" smtClean="0"/>
-              <a:t>1/03/2026</a:t>
+              <a:t>5/03/2026</a:t>
             </a:fld>
             <a:endParaRPr lang="es-PE" dirty="0"/>
           </a:p>
@@ -546,7 +522,7 @@
           <a:p>
             <a:fld id="{64955E78-CBAA-441B-9163-D9CD5E983BDA}" type="datetimeFigureOut">
               <a:rPr lang="en-US" smtClean="0"/>
-              <a:t>3/1/2026</a:t>
+              <a:t>3/5/2026</a:t>
             </a:fld>
             <a:endParaRPr lang="en-US" dirty="0"/>
           </a:p>
@@ -945,7 +921,7 @@
           <a:p>
             <a:fld id="{5C4C4E00-4716-4B48-9D97-535E4F94A274}" type="datetimeFigureOut">
               <a:rPr lang="es-PE" smtClean="0"/>
-              <a:t>1/03/2026</a:t>
+              <a:t>5/03/2026</a:t>
             </a:fld>
             <a:endParaRPr lang="es-PE" dirty="0"/>
           </a:p>
@@ -1115,7 +1091,7 @@
           <a:p>
             <a:fld id="{5C4C4E00-4716-4B48-9D97-535E4F94A274}" type="datetimeFigureOut">
               <a:rPr lang="es-PE" smtClean="0"/>
-              <a:t>1/03/2026</a:t>
+              <a:t>5/03/2026</a:t>
             </a:fld>
             <a:endParaRPr lang="es-PE" dirty="0"/>
           </a:p>
@@ -1295,7 +1271,7 @@
           <a:p>
             <a:fld id="{5C4C4E00-4716-4B48-9D97-535E4F94A274}" type="datetimeFigureOut">
               <a:rPr lang="es-PE" smtClean="0"/>
-              <a:t>1/03/2026</a:t>
+              <a:t>5/03/2026</a:t>
             </a:fld>
             <a:endParaRPr lang="es-PE" dirty="0"/>
           </a:p>
@@ -1465,7 +1441,7 @@
           <a:p>
             <a:fld id="{5C4C4E00-4716-4B48-9D97-535E4F94A274}" type="datetimeFigureOut">
               <a:rPr lang="es-PE" smtClean="0"/>
-              <a:t>1/03/2026</a:t>
+              <a:t>5/03/2026</a:t>
             </a:fld>
             <a:endParaRPr lang="es-PE" dirty="0"/>
           </a:p>
@@ -1709,7 +1685,7 @@
           <a:p>
             <a:fld id="{5C4C4E00-4716-4B48-9D97-535E4F94A274}" type="datetimeFigureOut">
               <a:rPr lang="es-PE" smtClean="0"/>
-              <a:t>1/03/2026</a:t>
+              <a:t>5/03/2026</a:t>
             </a:fld>
             <a:endParaRPr lang="es-PE" dirty="0"/>
           </a:p>
@@ -1941,7 +1917,7 @@
           <a:p>
             <a:fld id="{5C4C4E00-4716-4B48-9D97-535E4F94A274}" type="datetimeFigureOut">
               <a:rPr lang="es-PE" smtClean="0"/>
-              <a:t>1/03/2026</a:t>
+              <a:t>5/03/2026</a:t>
             </a:fld>
             <a:endParaRPr lang="es-PE" dirty="0"/>
           </a:p>
@@ -2308,7 +2284,7 @@
           <a:p>
             <a:fld id="{5C4C4E00-4716-4B48-9D97-535E4F94A274}" type="datetimeFigureOut">
               <a:rPr lang="es-PE" smtClean="0"/>
-              <a:t>1/03/2026</a:t>
+              <a:t>5/03/2026</a:t>
             </a:fld>
             <a:endParaRPr lang="es-PE" dirty="0"/>
           </a:p>
@@ -2426,7 +2402,7 @@
           <a:p>
             <a:fld id="{5C4C4E00-4716-4B48-9D97-535E4F94A274}" type="datetimeFigureOut">
               <a:rPr lang="es-PE" smtClean="0"/>
-              <a:t>1/03/2026</a:t>
+              <a:t>5/03/2026</a:t>
             </a:fld>
             <a:endParaRPr lang="es-PE" dirty="0"/>
           </a:p>
@@ -2521,7 +2497,7 @@
           <a:p>
             <a:fld id="{5C4C4E00-4716-4B48-9D97-535E4F94A274}" type="datetimeFigureOut">
               <a:rPr lang="es-PE" smtClean="0"/>
-              <a:t>1/03/2026</a:t>
+              <a:t>5/03/2026</a:t>
             </a:fld>
             <a:endParaRPr lang="es-PE" dirty="0"/>
           </a:p>
@@ -2798,7 +2774,7 @@
           <a:p>
             <a:fld id="{5C4C4E00-4716-4B48-9D97-535E4F94A274}" type="datetimeFigureOut">
               <a:rPr lang="es-PE" smtClean="0"/>
-              <a:t>1/03/2026</a:t>
+              <a:t>5/03/2026</a:t>
             </a:fld>
             <a:endParaRPr lang="es-PE" dirty="0"/>
           </a:p>
@@ -3055,7 +3031,7 @@
           <a:p>
             <a:fld id="{5C4C4E00-4716-4B48-9D97-535E4F94A274}" type="datetimeFigureOut">
               <a:rPr lang="es-PE" smtClean="0"/>
-              <a:t>1/03/2026</a:t>
+              <a:t>5/03/2026</a:t>
             </a:fld>
             <a:endParaRPr lang="es-PE" dirty="0"/>
           </a:p>
@@ -3268,7 +3244,7 @@
           <a:p>
             <a:fld id="{5C4C4E00-4716-4B48-9D97-535E4F94A274}" type="datetimeFigureOut">
               <a:rPr lang="es-PE" smtClean="0"/>
-              <a:t>1/03/2026</a:t>
+              <a:t>5/03/2026</a:t>
             </a:fld>
             <a:endParaRPr lang="es-PE" dirty="0"/>
           </a:p>
@@ -3679,6 +3655,137 @@
           <a:chExt cx="0" cy="0"/>
         </a:xfrm>
       </p:grpSpPr>
+      <p:sp>
+        <p:nvSpPr>
+          <p:cNvPr id="22" name="CuadroTexto 21">
+            <a:extLst>
+              <a:ext uri="{FF2B5EF4-FFF2-40B4-BE49-F238E27FC236}">
+                <a16:creationId xmlns:a16="http://schemas.microsoft.com/office/drawing/2014/main" id="{D6CB106F-7EC0-002A-CEBE-0064B169D038}"/>
+              </a:ext>
+            </a:extLst>
+          </p:cNvPr>
+          <p:cNvSpPr txBox="1">
+            <a:spLocks noGrp="1" noRot="1" noMove="1" noResize="1" noEditPoints="1" noAdjustHandles="1" noChangeArrowheads="1" noChangeShapeType="1"/>
+          </p:cNvSpPr>
+          <p:nvPr/>
+        </p:nvSpPr>
+        <p:spPr>
+          <a:xfrm>
+            <a:off x="655886" y="8793672"/>
+            <a:ext cx="2506575" cy="438582"/>
+          </a:xfrm>
+          <a:prstGeom prst="rect">
+            <a:avLst/>
+          </a:prstGeom>
+          <a:noFill/>
+        </p:spPr>
+        <p:txBody>
+          <a:bodyPr wrap="square" rtlCol="0">
+            <a:spAutoFit/>
+          </a:bodyPr>
+          <a:lstStyle/>
+          <a:p>
+            <a:pPr algn="ctr"/>
+            <a:r>
+              <a:rPr lang="es-PE" sz="1150" b="1" dirty="0">
+                <a:latin typeface="Arial" panose="020B0604020202020204" pitchFamily="34" charset="0"/>
+                <a:cs typeface="Arial" panose="020B0604020202020204" pitchFamily="34" charset="0"/>
+              </a:rPr>
+              <a:t>CHRISTIAN QUIÑONES CARLOS</a:t>
+            </a:r>
+          </a:p>
+          <a:p>
+            <a:pPr algn="ctr"/>
+            <a:r>
+              <a:rPr lang="es-PE" sz="1100" dirty="0">
+                <a:latin typeface="Arial" panose="020B0604020202020204" pitchFamily="34" charset="0"/>
+                <a:cs typeface="Arial" panose="020B0604020202020204" pitchFamily="34" charset="0"/>
+              </a:rPr>
+              <a:t>DIRECTOR ACADÉMICO</a:t>
+            </a:r>
+          </a:p>
+        </p:txBody>
+      </p:sp>
+      <p:sp>
+        <p:nvSpPr>
+          <p:cNvPr id="23" name="CuadroTexto 22">
+            <a:extLst>
+              <a:ext uri="{FF2B5EF4-FFF2-40B4-BE49-F238E27FC236}">
+                <a16:creationId xmlns:a16="http://schemas.microsoft.com/office/drawing/2014/main" id="{D962536F-CB9F-1938-8F28-5D8C8FE943C7}"/>
+              </a:ext>
+            </a:extLst>
+          </p:cNvPr>
+          <p:cNvSpPr txBox="1">
+            <a:spLocks noGrp="1" noRot="1" noMove="1" noResize="1" noEditPoints="1" noAdjustHandles="1" noChangeArrowheads="1" noChangeShapeType="1"/>
+          </p:cNvSpPr>
+          <p:nvPr/>
+        </p:nvSpPr>
+        <p:spPr>
+          <a:xfrm>
+            <a:off x="3527927" y="8788850"/>
+            <a:ext cx="2934555" cy="438582"/>
+          </a:xfrm>
+          <a:prstGeom prst="rect">
+            <a:avLst/>
+          </a:prstGeom>
+          <a:noFill/>
+        </p:spPr>
+        <p:txBody>
+          <a:bodyPr wrap="square" rtlCol="0">
+            <a:spAutoFit/>
+          </a:bodyPr>
+          <a:lstStyle/>
+          <a:p>
+            <a:pPr algn="ctr"/>
+            <a:r>
+              <a:rPr lang="es-PE" sz="1150" b="1" dirty="0">
+                <a:latin typeface="Arial" panose="020B0604020202020204" pitchFamily="34" charset="0"/>
+                <a:cs typeface="Arial" panose="020B0604020202020204" pitchFamily="34" charset="0"/>
+              </a:rPr>
+              <a:t>MARÍA AURORA CARLOS DE LA CRUZ</a:t>
+            </a:r>
+          </a:p>
+          <a:p>
+            <a:pPr algn="ctr"/>
+            <a:r>
+              <a:rPr lang="es-PE" sz="1100" dirty="0">
+                <a:latin typeface="Arial" panose="020B0604020202020204" pitchFamily="34" charset="0"/>
+                <a:cs typeface="Arial" panose="020B0604020202020204" pitchFamily="34" charset="0"/>
+              </a:rPr>
+              <a:t>DIRECTORA ADMINISTRATIVA</a:t>
+            </a:r>
+          </a:p>
+        </p:txBody>
+      </p:sp>
+      <p:pic>
+        <p:nvPicPr>
+          <p:cNvPr id="8" name="Imagen 7">
+            <a:extLst>
+              <a:ext uri="{FF2B5EF4-FFF2-40B4-BE49-F238E27FC236}">
+                <a16:creationId xmlns:a16="http://schemas.microsoft.com/office/drawing/2014/main" id="{E620381B-4FC1-7AC1-6064-1BDB1EDD40BC}"/>
+              </a:ext>
+            </a:extLst>
+          </p:cNvPr>
+          <p:cNvPicPr>
+            <a:picLocks noGrp="1" noRot="1" noChangeAspect="1" noMove="1" noResize="1" noEditPoints="1" noAdjustHandles="1" noChangeArrowheads="1" noChangeShapeType="1" noCrop="1"/>
+          </p:cNvPicPr>
+          <p:nvPr/>
+        </p:nvPicPr>
+        <p:blipFill rotWithShape="1">
+          <a:blip r:embed="rId2"/>
+          <a:srcRect b="15237"/>
+          <a:stretch/>
+        </p:blipFill>
+        <p:spPr>
+          <a:xfrm>
+            <a:off x="347662" y="7939316"/>
+            <a:ext cx="6162675" cy="1598588"/>
+          </a:xfrm>
+          <a:prstGeom prst="rect">
+            <a:avLst/>
+          </a:prstGeom>
+        </p:spPr>
+      </p:pic>
       <p:pic>
         <p:nvPicPr>
           <p:cNvPr id="5" name="Imagen 4">
@@ -3694,7 +3801,7 @@
           <p:nvPr/>
         </p:nvPicPr>
         <p:blipFill rotWithShape="1">
-          <a:blip r:embed="rId2" cstate="print">
+          <a:blip r:embed="rId3" cstate="print">
             <a:extLst>
               <a:ext uri="{28A0092B-C50C-407E-A947-70E740481C1C}">
                 <a14:useLocalDpi xmlns:a14="http://schemas.microsoft.com/office/drawing/2010/main" val="0"/>
@@ -3729,7 +3836,7 @@
           <p:nvPr/>
         </p:nvPicPr>
         <p:blipFill rotWithShape="1">
-          <a:blip r:embed="rId3">
+          <a:blip r:embed="rId4">
             <a:lum bright="70000" contrast="-70000"/>
             <a:extLst>
               <a:ext uri="{28A0092B-C50C-407E-A947-70E740481C1C}">
@@ -3764,7 +3871,7 @@
         </p:nvSpPr>
         <p:spPr>
           <a:xfrm>
-            <a:off x="792012" y="2860373"/>
+            <a:off x="792012" y="2846926"/>
             <a:ext cx="5273976" cy="954107"/>
           </a:xfrm>
           <a:prstGeom prst="rect">
@@ -3885,7 +3992,7 @@
           <p:nvPr/>
         </p:nvPicPr>
         <p:blipFill>
-          <a:blip r:embed="rId4" cstate="print">
+          <a:blip r:embed="rId5" cstate="print">
             <a:clrChange>
               <a:clrFrom>
                 <a:srgbClr val="FAFAFA"/>
@@ -4030,338 +4137,6 @@
           </a:p>
         </p:txBody>
       </p:sp>
-      <p:grpSp>
-        <p:nvGrpSpPr>
-          <p:cNvPr id="10" name="Grupo 9">
-            <a:extLst>
-              <a:ext uri="{FF2B5EF4-FFF2-40B4-BE49-F238E27FC236}">
-                <a16:creationId xmlns:a16="http://schemas.microsoft.com/office/drawing/2014/main" id="{63BE2411-0560-20B4-44E7-9E59B1CF57D2}"/>
-              </a:ext>
-            </a:extLst>
-          </p:cNvPr>
-          <p:cNvGrpSpPr/>
-          <p:nvPr/>
-        </p:nvGrpSpPr>
-        <p:grpSpPr>
-          <a:xfrm>
-            <a:off x="570664" y="3783143"/>
-            <a:ext cx="5863899" cy="3059119"/>
-            <a:chOff x="570664" y="3783143"/>
-            <a:chExt cx="5863899" cy="3059119"/>
-          </a:xfrm>
-        </p:grpSpPr>
-        <p:sp>
-          <p:nvSpPr>
-            <p:cNvPr id="19" name="PH_CONTENIDO_PRINCIPAL">
-              <a:extLst>
-                <a:ext uri="{FF2B5EF4-FFF2-40B4-BE49-F238E27FC236}">
-                  <a16:creationId xmlns:a16="http://schemas.microsoft.com/office/drawing/2014/main" id="{991C4A27-894B-7257-8062-6F839343BAAD}"/>
-                </a:ext>
-              </a:extLst>
-            </p:cNvPr>
-            <p:cNvSpPr/>
-            <p:nvPr/>
-          </p:nvSpPr>
-          <p:spPr>
-            <a:xfrm>
-              <a:off x="570664" y="3783143"/>
-              <a:ext cx="5716673" cy="2600712"/>
-            </a:xfrm>
-            <a:prstGeom prst="rect">
-              <a:avLst/>
-            </a:prstGeom>
-            <a:ln>
-              <a:noFill/>
-            </a:ln>
-          </p:spPr>
-          <p:txBody>
-            <a:bodyPr vert="horz" lIns="0" tIns="0" rIns="0" bIns="0" rtlCol="0" anchor="t" anchorCtr="1">
-              <a:spAutoFit/>
-            </a:bodyPr>
-            <a:lstStyle/>
-            <a:p>
-              <a:pPr algn="ctr">
-                <a:spcBef>
-                  <a:spcPts val="600"/>
-                </a:spcBef>
-              </a:pPr>
-              <a:r>
-                <a:rPr lang="es-PE" sz="1400" dirty="0">
-                  <a:solidFill>
-                    <a:srgbClr val="000000"/>
-                  </a:solidFill>
-                  <a:effectLst/>
-                  <a:latin typeface="Times New Roman" panose="02020603050405020304" pitchFamily="18" charset="0"/>
-                  <a:ea typeface="Times New Roman" panose="02020603050405020304" pitchFamily="18" charset="0"/>
-                  <a:cs typeface="Times New Roman" panose="02020603050405020304" pitchFamily="18" charset="0"/>
-                </a:rPr>
-                <a:t>Por haber culminado satisfactoriamente el DIPLOMADO en:</a:t>
-              </a:r>
-            </a:p>
-            <a:p>
-              <a:pPr algn="ctr">
-                <a:spcBef>
-                  <a:spcPts val="600"/>
-                </a:spcBef>
-              </a:pPr>
-              <a:r>
-                <a:rPr lang="es-PE" sz="2800" dirty="0">
-                  <a:solidFill>
-                    <a:schemeClr val="tx2">
-                      <a:lumMod val="50000"/>
-                    </a:schemeClr>
-                  </a:solidFill>
-                  <a:latin typeface="Britannic Bold" panose="020B0903060703020204" pitchFamily="34" charset="0"/>
-                  <a:ea typeface="Times New Roman" panose="02020603050405020304" pitchFamily="18" charset="0"/>
-                  <a:cs typeface="Simplified Arabic" panose="02020603050405020304" pitchFamily="18" charset="-78"/>
-                </a:rPr>
-                <a:t>“{{TEMA_DIPLOMADO}}</a:t>
-              </a:r>
-              <a:r>
-                <a:rPr lang="es-PE" sz="2800" dirty="0">
-                  <a:solidFill>
-                    <a:schemeClr val="tx2">
-                      <a:lumMod val="50000"/>
-                    </a:schemeClr>
-                  </a:solidFill>
-                  <a:effectLst/>
-                  <a:latin typeface="Britannic Bold" panose="020B0903060703020204" pitchFamily="34" charset="0"/>
-                  <a:ea typeface="Times New Roman" panose="02020603050405020304" pitchFamily="18" charset="0"/>
-                  <a:cs typeface="Simplified Arabic" panose="02020603050405020304" pitchFamily="18" charset="-78"/>
-                </a:rPr>
-                <a:t>”</a:t>
-              </a:r>
-            </a:p>
-            <a:p>
-              <a:pPr algn="ctr">
-                <a:spcBef>
-                  <a:spcPts val="600"/>
-                </a:spcBef>
-              </a:pPr>
-              <a:r>
-                <a:rPr lang="es-PE" sz="1400" dirty="0">
-                  <a:solidFill>
-                    <a:srgbClr val="000000"/>
-                  </a:solidFill>
-                  <a:effectLst/>
-                  <a:latin typeface="Arial" panose="020B0604020202020204" pitchFamily="34" charset="0"/>
-                  <a:ea typeface="Times New Roman" panose="02020603050405020304" pitchFamily="18" charset="0"/>
-                  <a:cs typeface="Arial" panose="020B0604020202020204" pitchFamily="34" charset="0"/>
-                </a:rPr>
-                <a:t> </a:t>
-              </a:r>
-              <a:r>
-                <a:rPr lang="es-PE" sz="1400" dirty="0">
-                  <a:solidFill>
-                    <a:srgbClr val="000000"/>
-                  </a:solidFill>
-                  <a:effectLst/>
-                  <a:latin typeface="Times New Roman" panose="02020603050405020304" pitchFamily="18" charset="0"/>
-                  <a:ea typeface="Times New Roman" panose="02020603050405020304" pitchFamily="18" charset="0"/>
-                  <a:cs typeface="Times New Roman" panose="02020603050405020304" pitchFamily="18" charset="0"/>
-                </a:rPr>
-                <a:t>Realizado por el Instituto Peruano de Diplomados y Especializaciones, que mantuvo participación acad</a:t>
-              </a:r>
-              <a:r>
-                <a:rPr lang="es-PE" sz="1400" dirty="0">
-                  <a:solidFill>
-                    <a:srgbClr val="000000"/>
-                  </a:solidFill>
-                  <a:latin typeface="Times New Roman" panose="02020603050405020304" pitchFamily="18" charset="0"/>
-                  <a:ea typeface="Times New Roman" panose="02020603050405020304" pitchFamily="18" charset="0"/>
-                  <a:cs typeface="Times New Roman" panose="02020603050405020304" pitchFamily="18" charset="0"/>
-                </a:rPr>
-                <a:t>émica con la Escuela de Posgrado de la Universidad Nacional de Trujillo</a:t>
-              </a:r>
-              <a:r>
-                <a:rPr lang="es-PE" sz="1400" dirty="0">
-                  <a:solidFill>
-                    <a:srgbClr val="000000"/>
-                  </a:solidFill>
-                  <a:effectLst/>
-                  <a:latin typeface="Times New Roman" panose="02020603050405020304" pitchFamily="18" charset="0"/>
-                  <a:ea typeface="Times New Roman" panose="02020603050405020304" pitchFamily="18" charset="0"/>
-                  <a:cs typeface="Times New Roman" panose="02020603050405020304" pitchFamily="18" charset="0"/>
-                </a:rPr>
-                <a:t>, según Resolución </a:t>
-              </a:r>
-              <a:r>
-                <a:rPr lang="es-PE" sz="1400" dirty="0">
-                  <a:solidFill>
-                    <a:srgbClr val="000000"/>
-                  </a:solidFill>
-                  <a:latin typeface="Times New Roman" panose="02020603050405020304" pitchFamily="18" charset="0"/>
-                  <a:ea typeface="Times New Roman" panose="02020603050405020304" pitchFamily="18" charset="0"/>
-                  <a:cs typeface="Times New Roman" panose="02020603050405020304" pitchFamily="18" charset="0"/>
-                </a:rPr>
-                <a:t>Directoral </a:t>
-              </a:r>
-              <a:r>
-                <a:rPr lang="es-PE" sz="1400" dirty="0">
-                  <a:solidFill>
-                    <a:srgbClr val="000000"/>
-                  </a:solidFill>
-                  <a:effectLst/>
-                  <a:latin typeface="Times New Roman" panose="02020603050405020304" pitchFamily="18" charset="0"/>
-                  <a:ea typeface="Times New Roman" panose="02020603050405020304" pitchFamily="18" charset="0"/>
-                  <a:cs typeface="Times New Roman" panose="02020603050405020304" pitchFamily="18" charset="0"/>
-                </a:rPr>
-                <a:t>N° </a:t>
-              </a:r>
-              <a:r>
-                <a:rPr lang="es-PE" sz="1400" dirty="0">
-                  <a:solidFill>
-                    <a:srgbClr val="000000"/>
-                  </a:solidFill>
-                  <a:latin typeface="Times New Roman" panose="02020603050405020304" pitchFamily="18" charset="0"/>
-                  <a:ea typeface="Times New Roman" panose="02020603050405020304" pitchFamily="18" charset="0"/>
-                  <a:cs typeface="Times New Roman" panose="02020603050405020304" pitchFamily="18" charset="0"/>
-                </a:rPr>
-                <a:t>2477</a:t>
-              </a:r>
-              <a:r>
-                <a:rPr lang="es-PE" sz="1400" dirty="0">
-                  <a:solidFill>
-                    <a:srgbClr val="000000"/>
-                  </a:solidFill>
-                  <a:effectLst/>
-                  <a:latin typeface="Times New Roman" panose="02020603050405020304" pitchFamily="18" charset="0"/>
-                  <a:ea typeface="Times New Roman" panose="02020603050405020304" pitchFamily="18" charset="0"/>
-                  <a:cs typeface="Times New Roman" panose="02020603050405020304" pitchFamily="18" charset="0"/>
-                </a:rPr>
-                <a:t>-2018-EPG/UNT</a:t>
-              </a:r>
-              <a:r>
-                <a:rPr lang="es-PE" sz="1400" dirty="0">
-                  <a:solidFill>
-                    <a:srgbClr val="000000"/>
-                  </a:solidFill>
-                  <a:latin typeface="Times New Roman" panose="02020603050405020304" pitchFamily="18" charset="0"/>
-                  <a:ea typeface="Times New Roman" panose="02020603050405020304" pitchFamily="18" charset="0"/>
-                  <a:cs typeface="Times New Roman" panose="02020603050405020304" pitchFamily="18" charset="0"/>
-                </a:rPr>
-                <a:t>. R</a:t>
-              </a:r>
-              <a:r>
-                <a:rPr lang="es-PE" sz="1400" dirty="0">
-                  <a:solidFill>
-                    <a:srgbClr val="000000"/>
-                  </a:solidFill>
-                  <a:effectLst/>
-                  <a:latin typeface="Times New Roman" panose="02020603050405020304" pitchFamily="18" charset="0"/>
-                  <a:ea typeface="Times New Roman" panose="02020603050405020304" pitchFamily="18" charset="0"/>
-                  <a:cs typeface="Times New Roman" panose="02020603050405020304" pitchFamily="18" charset="0"/>
-                </a:rPr>
-                <a:t>ealizado </a:t>
-              </a:r>
-              <a:r>
-                <a:rPr lang="es-PE" sz="1400" dirty="0">
-                  <a:solidFill>
-                    <a:srgbClr val="000000"/>
-                  </a:solidFill>
-                  <a:latin typeface="Times New Roman" panose="02020603050405020304" pitchFamily="18" charset="0"/>
-                  <a:ea typeface="Times New Roman" panose="02020603050405020304" pitchFamily="18" charset="0"/>
-                  <a:cs typeface="Times New Roman" panose="02020603050405020304" pitchFamily="18" charset="0"/>
-                </a:rPr>
-                <a:t>del {{FECHA_INICIO}} al {{FECHA_FIN}}</a:t>
-              </a:r>
-              <a:r>
-                <a:rPr lang="es-PE" sz="1400" dirty="0">
-                  <a:solidFill>
-                    <a:srgbClr val="000000"/>
-                  </a:solidFill>
-                  <a:effectLst/>
-                  <a:latin typeface="Times New Roman" panose="02020603050405020304" pitchFamily="18" charset="0"/>
-                  <a:ea typeface="Times New Roman" panose="02020603050405020304" pitchFamily="18" charset="0"/>
-                  <a:cs typeface="Times New Roman" panose="02020603050405020304" pitchFamily="18" charset="0"/>
-                </a:rPr>
-                <a:t>, con una duración de {{HORAS_ACADEMICAS}} horas académicas, equivalente a {{CREDITOS_ACADEMICOS}} créditos académicos.</a:t>
-              </a:r>
-              <a:endParaRPr lang="es-PE" sz="800" dirty="0">
-                <a:solidFill>
-                  <a:srgbClr val="000000"/>
-                </a:solidFill>
-                <a:effectLst/>
-                <a:latin typeface="Times New Roman" panose="02020603050405020304" pitchFamily="18" charset="0"/>
-                <a:ea typeface="Times New Roman" panose="02020603050405020304" pitchFamily="18" charset="0"/>
-                <a:cs typeface="Times New Roman" panose="02020603050405020304" pitchFamily="18" charset="0"/>
-              </a:endParaRPr>
-            </a:p>
-            <a:p>
-              <a:pPr algn="ctr">
-                <a:spcBef>
-                  <a:spcPts val="600"/>
-                </a:spcBef>
-              </a:pPr>
-              <a:r>
-                <a:rPr lang="es-PE" sz="1400" dirty="0">
-                  <a:latin typeface="Times New Roman" panose="02020603050405020304" pitchFamily="18" charset="0"/>
-                  <a:ea typeface="Cambria Math" panose="02040503050406030204" pitchFamily="18" charset="0"/>
-                  <a:cs typeface="Times New Roman" panose="02020603050405020304" pitchFamily="18" charset="0"/>
-                </a:rPr>
-                <a:t>Por tanto, se expide el presente {{MODELO_MINUSCULA}} otorgándole los privilegios y consideraciones que le corresponden.</a:t>
-              </a:r>
-            </a:p>
-          </p:txBody>
-        </p:sp>
-        <p:sp>
-          <p:nvSpPr>
-            <p:cNvPr id="7" name="PH_FECHA_EMISION_LARGA">
-              <a:extLst>
-                <a:ext uri="{FF2B5EF4-FFF2-40B4-BE49-F238E27FC236}">
-                  <a16:creationId xmlns:a16="http://schemas.microsoft.com/office/drawing/2014/main" id="{F36D8880-B179-580E-0319-C4E9487E072A}"/>
-                </a:ext>
-              </a:extLst>
-            </p:cNvPr>
-            <p:cNvSpPr/>
-            <p:nvPr/>
-          </p:nvSpPr>
-          <p:spPr>
-            <a:xfrm>
-              <a:off x="3075083" y="6521982"/>
-              <a:ext cx="3359480" cy="320280"/>
-            </a:xfrm>
-            <a:prstGeom prst="rect">
-              <a:avLst/>
-            </a:prstGeom>
-          </p:spPr>
-          <p:txBody>
-            <a:bodyPr wrap="square">
-              <a:spAutoFit/>
-            </a:bodyPr>
-            <a:lstStyle/>
-            <a:p>
-              <a:pPr lvl="0" algn="r">
-                <a:lnSpc>
-                  <a:spcPct val="115000"/>
-                </a:lnSpc>
-                <a:spcBef>
-                  <a:spcPts val="59"/>
-                </a:spcBef>
-              </a:pPr>
-              <a:r>
-                <a:rPr lang="es-PE" sz="1400" dirty="0">
-                  <a:solidFill>
-                    <a:prstClr val="black"/>
-                  </a:solidFill>
-                  <a:latin typeface="Times New Roman" panose="02020603050405020304" pitchFamily="18" charset="0"/>
-                  <a:ea typeface="Cambria Math" panose="02040503050406030204" pitchFamily="18" charset="0"/>
-                  <a:cs typeface="Times New Roman" panose="02020603050405020304" pitchFamily="18" charset="0"/>
-                </a:rPr>
-                <a:t>Trujillo, {{FECHA_EMISION_LARGA}}</a:t>
-              </a:r>
-              <a:endParaRPr lang="en-US" sz="1400" dirty="0">
-                <a:solidFill>
-                  <a:prstClr val="black"/>
-                </a:solidFill>
-                <a:latin typeface="Times New Roman" panose="02020603050405020304" pitchFamily="18" charset="0"/>
-                <a:ea typeface="Cambria Math" panose="02040503050406030204" pitchFamily="18" charset="0"/>
-                <a:cs typeface="Times New Roman" panose="02020603050405020304" pitchFamily="18" charset="0"/>
-              </a:endParaRPr>
-            </a:p>
-          </p:txBody>
-        </p:sp>
-      </p:grpSp>
       <p:pic>
         <p:nvPicPr>
           <p:cNvPr id="4" name="Imagen 3">
@@ -4377,7 +4152,7 @@
           <p:nvPr/>
         </p:nvPicPr>
         <p:blipFill rotWithShape="1">
-          <a:blip r:embed="rId5" cstate="print">
+          <a:blip r:embed="rId6" cstate="print">
             <a:extLst>
               <a:ext uri="{28A0092B-C50C-407E-A947-70E740481C1C}">
                 <a14:useLocalDpi xmlns:a14="http://schemas.microsoft.com/office/drawing/2010/main" val="0"/>
@@ -4399,135 +4174,284 @@
       </p:pic>
       <p:sp>
         <p:nvSpPr>
-          <p:cNvPr id="22" name="CuadroTexto 21">
+          <p:cNvPr id="19" name="PH_CONTENIDO_PRINCIPAL">
             <a:extLst>
               <a:ext uri="{FF2B5EF4-FFF2-40B4-BE49-F238E27FC236}">
-                <a16:creationId xmlns:a16="http://schemas.microsoft.com/office/drawing/2014/main" id="{D6CB106F-7EC0-002A-CEBE-0064B169D038}"/>
+                <a16:creationId xmlns:a16="http://schemas.microsoft.com/office/drawing/2014/main" id="{991C4A27-894B-7257-8062-6F839343BAAD}"/>
               </a:ext>
             </a:extLst>
           </p:cNvPr>
-          <p:cNvSpPr txBox="1">
-            <a:spLocks noGrp="1" noRot="1" noMove="1" noResize="1" noEditPoints="1" noAdjustHandles="1" noChangeArrowheads="1" noChangeShapeType="1"/>
-          </p:cNvSpPr>
+          <p:cNvSpPr/>
           <p:nvPr/>
         </p:nvSpPr>
         <p:spPr>
           <a:xfrm>
-            <a:off x="655886" y="8793672"/>
-            <a:ext cx="2506575" cy="438582"/>
+            <a:off x="419400" y="3756249"/>
+            <a:ext cx="6019200" cy="2893100"/>
           </a:xfrm>
           <a:prstGeom prst="rect">
             <a:avLst/>
           </a:prstGeom>
-          <a:noFill/>
+          <a:ln>
+            <a:noFill/>
+          </a:ln>
         </p:spPr>
         <p:txBody>
-          <a:bodyPr wrap="square" rtlCol="0">
+          <a:bodyPr vert="horz" lIns="0" tIns="0" rIns="0" bIns="0" rtlCol="0" anchor="t" anchorCtr="1">
             <a:spAutoFit/>
           </a:bodyPr>
           <a:lstStyle/>
           <a:p>
-            <a:pPr algn="ctr"/>
-            <a:r>
-              <a:rPr lang="es-PE" sz="1150" b="1" dirty="0">
+            <a:pPr algn="ctr">
+              <a:spcBef>
+                <a:spcPts val="600"/>
+              </a:spcBef>
+            </a:pPr>
+            <a:r>
+              <a:rPr lang="es-PE" sz="1400" dirty="0">
+                <a:solidFill>
+                  <a:srgbClr val="000000"/>
+                </a:solidFill>
+                <a:effectLst/>
+                <a:latin typeface="Times New Roman" panose="02020603050405020304" pitchFamily="18" charset="0"/>
+                <a:ea typeface="Times New Roman" panose="02020603050405020304" pitchFamily="18" charset="0"/>
+                <a:cs typeface="Times New Roman" panose="02020603050405020304" pitchFamily="18" charset="0"/>
+              </a:rPr>
+              <a:t>Por haber culminado satisfactoriamente el DIPLOMADO en:</a:t>
+            </a:r>
+          </a:p>
+          <a:p>
+            <a:pPr algn="ctr">
+              <a:spcBef>
+                <a:spcPts val="600"/>
+              </a:spcBef>
+            </a:pPr>
+            <a:r>
+              <a:rPr lang="es-PE" sz="2800" dirty="0">
+                <a:solidFill>
+                  <a:schemeClr val="tx2">
+                    <a:lumMod val="50000"/>
+                  </a:schemeClr>
+                </a:solidFill>
+                <a:latin typeface="Britannic Bold" panose="020B0903060703020204" pitchFamily="34" charset="0"/>
+                <a:ea typeface="Times New Roman" panose="02020603050405020304" pitchFamily="18" charset="0"/>
+                <a:cs typeface="Simplified Arabic" panose="02020603050405020304" pitchFamily="18" charset="-78"/>
+              </a:rPr>
+              <a:t>“{{TEMA_DIPLOMADO}}</a:t>
+            </a:r>
+            <a:r>
+              <a:rPr lang="es-PE" sz="2800" dirty="0">
+                <a:solidFill>
+                  <a:schemeClr val="tx2">
+                    <a:lumMod val="50000"/>
+                  </a:schemeClr>
+                </a:solidFill>
+                <a:effectLst/>
+                <a:latin typeface="Britannic Bold" panose="020B0903060703020204" pitchFamily="34" charset="0"/>
+                <a:ea typeface="Times New Roman" panose="02020603050405020304" pitchFamily="18" charset="0"/>
+                <a:cs typeface="Simplified Arabic" panose="02020603050405020304" pitchFamily="18" charset="-78"/>
+              </a:rPr>
+              <a:t>”</a:t>
+            </a:r>
+          </a:p>
+          <a:p>
+            <a:pPr algn="ctr">
+              <a:spcBef>
+                <a:spcPts val="600"/>
+              </a:spcBef>
+            </a:pPr>
+            <a:r>
+              <a:rPr lang="es-PE" sz="1400" dirty="0">
+                <a:solidFill>
+                  <a:srgbClr val="000000"/>
+                </a:solidFill>
+                <a:effectLst/>
                 <a:latin typeface="Arial" panose="020B0604020202020204" pitchFamily="34" charset="0"/>
+                <a:ea typeface="Times New Roman" panose="02020603050405020304" pitchFamily="18" charset="0"/>
                 <a:cs typeface="Arial" panose="020B0604020202020204" pitchFamily="34" charset="0"/>
               </a:rPr>
-              <a:t>CHRISTIAN QUIÑONES CARLOS</a:t>
-            </a:r>
-          </a:p>
-          <a:p>
-            <a:pPr algn="ctr"/>
-            <a:r>
-              <a:rPr lang="es-PE" sz="1100" dirty="0">
-                <a:latin typeface="Arial" panose="020B0604020202020204" pitchFamily="34" charset="0"/>
-                <a:cs typeface="Arial" panose="020B0604020202020204" pitchFamily="34" charset="0"/>
+              <a:t> </a:t>
+            </a:r>
+            <a:r>
+              <a:rPr lang="es-PE" sz="1400" dirty="0">
+                <a:solidFill>
+                  <a:srgbClr val="000000"/>
+                </a:solidFill>
+                <a:effectLst/>
+                <a:latin typeface="Times New Roman" panose="02020603050405020304" pitchFamily="18" charset="0"/>
+                <a:ea typeface="Times New Roman" panose="02020603050405020304" pitchFamily="18" charset="0"/>
+                <a:cs typeface="Times New Roman" panose="02020603050405020304" pitchFamily="18" charset="0"/>
               </a:rPr>
-              <a:t>DIRECTOR ACADÉMICO</a:t>
-            </a:r>
-          </a:p>
-        </p:txBody>
-      </p:sp>
-      <p:sp>
-        <p:nvSpPr>
-          <p:cNvPr id="23" name="CuadroTexto 22">
-            <a:extLst>
-              <a:ext uri="{FF2B5EF4-FFF2-40B4-BE49-F238E27FC236}">
-                <a16:creationId xmlns:a16="http://schemas.microsoft.com/office/drawing/2014/main" id="{D962536F-CB9F-1938-8F28-5D8C8FE943C7}"/>
-              </a:ext>
-            </a:extLst>
-          </p:cNvPr>
-          <p:cNvSpPr txBox="1">
-            <a:spLocks noGrp="1" noRot="1" noMove="1" noResize="1" noEditPoints="1" noAdjustHandles="1" noChangeArrowheads="1" noChangeShapeType="1"/>
-          </p:cNvSpPr>
-          <p:nvPr/>
-        </p:nvSpPr>
-        <p:spPr>
-          <a:xfrm>
-            <a:off x="3527927" y="8788850"/>
-            <a:ext cx="2934555" cy="438582"/>
-          </a:xfrm>
-          <a:prstGeom prst="rect">
-            <a:avLst/>
-          </a:prstGeom>
-          <a:noFill/>
-        </p:spPr>
-        <p:txBody>
-          <a:bodyPr wrap="square" rtlCol="0">
-            <a:spAutoFit/>
-          </a:bodyPr>
-          <a:lstStyle/>
-          <a:p>
-            <a:pPr algn="ctr"/>
-            <a:r>
-              <a:rPr lang="es-PE" sz="1150" b="1" dirty="0">
-                <a:latin typeface="Arial" panose="020B0604020202020204" pitchFamily="34" charset="0"/>
-                <a:cs typeface="Arial" panose="020B0604020202020204" pitchFamily="34" charset="0"/>
+              <a:t>Realizado por el Instituto Peruano de Diplomados y Especializaciones, que mantuvo participación acad</a:t>
+            </a:r>
+            <a:r>
+              <a:rPr lang="es-PE" sz="1400" dirty="0">
+                <a:solidFill>
+                  <a:srgbClr val="000000"/>
+                </a:solidFill>
+                <a:latin typeface="Times New Roman" panose="02020603050405020304" pitchFamily="18" charset="0"/>
+                <a:ea typeface="Times New Roman" panose="02020603050405020304" pitchFamily="18" charset="0"/>
+                <a:cs typeface="Times New Roman" panose="02020603050405020304" pitchFamily="18" charset="0"/>
               </a:rPr>
-              <a:t>MARÍA AURORA CARLOS DE LA CRUZ</a:t>
-            </a:r>
-          </a:p>
-          <a:p>
-            <a:pPr algn="ctr"/>
-            <a:r>
-              <a:rPr lang="es-PE" sz="1100" dirty="0">
-                <a:latin typeface="Arial" panose="020B0604020202020204" pitchFamily="34" charset="0"/>
-                <a:cs typeface="Arial" panose="020B0604020202020204" pitchFamily="34" charset="0"/>
+              <a:t>émica con la Escuela de Posgrado de la Universidad Nacional de Trujillo</a:t>
+            </a:r>
+            <a:r>
+              <a:rPr lang="es-PE" sz="1400" dirty="0">
+                <a:solidFill>
+                  <a:srgbClr val="000000"/>
+                </a:solidFill>
+                <a:effectLst/>
+                <a:latin typeface="Times New Roman" panose="02020603050405020304" pitchFamily="18" charset="0"/>
+                <a:ea typeface="Times New Roman" panose="02020603050405020304" pitchFamily="18" charset="0"/>
+                <a:cs typeface="Times New Roman" panose="02020603050405020304" pitchFamily="18" charset="0"/>
               </a:rPr>
-              <a:t>DIRECTORA ADMINISTRATIVA</a:t>
-            </a:r>
-          </a:p>
-        </p:txBody>
-      </p:sp>
-      <p:pic>
-        <p:nvPicPr>
-          <p:cNvPr id="8" name="Imagen 7">
-            <a:extLst>
-              <a:ext uri="{FF2B5EF4-FFF2-40B4-BE49-F238E27FC236}">
-                <a16:creationId xmlns:a16="http://schemas.microsoft.com/office/drawing/2014/main" id="{E620381B-4FC1-7AC1-6064-1BDB1EDD40BC}"/>
-              </a:ext>
-            </a:extLst>
-          </p:cNvPr>
-          <p:cNvPicPr>
-            <a:picLocks noGrp="1" noRot="1" noChangeAspect="1" noMove="1" noResize="1" noEditPoints="1" noAdjustHandles="1" noChangeArrowheads="1" noChangeShapeType="1" noCrop="1"/>
-          </p:cNvPicPr>
-          <p:nvPr/>
-        </p:nvPicPr>
-        <p:blipFill rotWithShape="1">
-          <a:blip r:embed="rId6"/>
-          <a:srcRect b="15237"/>
-          <a:stretch/>
-        </p:blipFill>
-        <p:spPr>
-          <a:xfrm>
-            <a:off x="347662" y="7939316"/>
-            <a:ext cx="6162675" cy="1598588"/>
-          </a:xfrm>
-          <a:prstGeom prst="rect">
-            <a:avLst/>
-          </a:prstGeom>
-        </p:spPr>
-      </p:pic>
+              <a:t>, según Resolución </a:t>
+            </a:r>
+            <a:r>
+              <a:rPr lang="es-PE" sz="1400" dirty="0">
+                <a:solidFill>
+                  <a:srgbClr val="000000"/>
+                </a:solidFill>
+                <a:latin typeface="Times New Roman" panose="02020603050405020304" pitchFamily="18" charset="0"/>
+                <a:ea typeface="Times New Roman" panose="02020603050405020304" pitchFamily="18" charset="0"/>
+                <a:cs typeface="Times New Roman" panose="02020603050405020304" pitchFamily="18" charset="0"/>
+              </a:rPr>
+              <a:t>Directoral </a:t>
+            </a:r>
+            <a:r>
+              <a:rPr lang="es-PE" sz="1400" dirty="0">
+                <a:solidFill>
+                  <a:srgbClr val="000000"/>
+                </a:solidFill>
+                <a:effectLst/>
+                <a:latin typeface="Times New Roman" panose="02020603050405020304" pitchFamily="18" charset="0"/>
+                <a:ea typeface="Times New Roman" panose="02020603050405020304" pitchFamily="18" charset="0"/>
+                <a:cs typeface="Times New Roman" panose="02020603050405020304" pitchFamily="18" charset="0"/>
+              </a:rPr>
+              <a:t>N° </a:t>
+            </a:r>
+            <a:r>
+              <a:rPr lang="es-PE" sz="1400" dirty="0">
+                <a:solidFill>
+                  <a:srgbClr val="000000"/>
+                </a:solidFill>
+                <a:latin typeface="Times New Roman" panose="02020603050405020304" pitchFamily="18" charset="0"/>
+                <a:ea typeface="Times New Roman" panose="02020603050405020304" pitchFamily="18" charset="0"/>
+                <a:cs typeface="Times New Roman" panose="02020603050405020304" pitchFamily="18" charset="0"/>
+              </a:rPr>
+              <a:t>2477</a:t>
+            </a:r>
+            <a:r>
+              <a:rPr lang="es-PE" sz="1400" dirty="0">
+                <a:solidFill>
+                  <a:srgbClr val="000000"/>
+                </a:solidFill>
+                <a:effectLst/>
+                <a:latin typeface="Times New Roman" panose="02020603050405020304" pitchFamily="18" charset="0"/>
+                <a:ea typeface="Times New Roman" panose="02020603050405020304" pitchFamily="18" charset="0"/>
+                <a:cs typeface="Times New Roman" panose="02020603050405020304" pitchFamily="18" charset="0"/>
+              </a:rPr>
+              <a:t>-2018-EPG/UNT</a:t>
+            </a:r>
+            <a:r>
+              <a:rPr lang="es-PE" sz="1400" dirty="0">
+                <a:solidFill>
+                  <a:srgbClr val="000000"/>
+                </a:solidFill>
+                <a:latin typeface="Times New Roman" panose="02020603050405020304" pitchFamily="18" charset="0"/>
+                <a:ea typeface="Times New Roman" panose="02020603050405020304" pitchFamily="18" charset="0"/>
+                <a:cs typeface="Times New Roman" panose="02020603050405020304" pitchFamily="18" charset="0"/>
+              </a:rPr>
+              <a:t>. R</a:t>
+            </a:r>
+            <a:r>
+              <a:rPr lang="es-PE" sz="1400" dirty="0">
+                <a:solidFill>
+                  <a:srgbClr val="000000"/>
+                </a:solidFill>
+                <a:effectLst/>
+                <a:latin typeface="Times New Roman" panose="02020603050405020304" pitchFamily="18" charset="0"/>
+                <a:ea typeface="Times New Roman" panose="02020603050405020304" pitchFamily="18" charset="0"/>
+                <a:cs typeface="Times New Roman" panose="02020603050405020304" pitchFamily="18" charset="0"/>
+              </a:rPr>
+              <a:t>ealizado </a:t>
+            </a:r>
+            <a:r>
+              <a:rPr lang="es-PE" sz="1400" dirty="0">
+                <a:solidFill>
+                  <a:srgbClr val="000000"/>
+                </a:solidFill>
+                <a:latin typeface="Times New Roman" panose="02020603050405020304" pitchFamily="18" charset="0"/>
+                <a:ea typeface="Times New Roman" panose="02020603050405020304" pitchFamily="18" charset="0"/>
+                <a:cs typeface="Times New Roman" panose="02020603050405020304" pitchFamily="18" charset="0"/>
+              </a:rPr>
+              <a:t>del {{FECHA_INICIO}} al {{FECHA_FIN}}</a:t>
+            </a:r>
+            <a:r>
+              <a:rPr lang="es-PE" sz="1400" dirty="0">
+                <a:solidFill>
+                  <a:srgbClr val="000000"/>
+                </a:solidFill>
+                <a:effectLst/>
+                <a:latin typeface="Times New Roman" panose="02020603050405020304" pitchFamily="18" charset="0"/>
+                <a:ea typeface="Times New Roman" panose="02020603050405020304" pitchFamily="18" charset="0"/>
+                <a:cs typeface="Times New Roman" panose="02020603050405020304" pitchFamily="18" charset="0"/>
+              </a:rPr>
+              <a:t>, con una duración de {{HORAS_ACADEMICAS}} horas académicas, equivalente a {{CREDITOS_ACADEMICOS}} créditos académicos.</a:t>
+            </a:r>
+            <a:endParaRPr lang="es-PE" sz="800" dirty="0">
+              <a:solidFill>
+                <a:srgbClr val="000000"/>
+              </a:solidFill>
+              <a:effectLst/>
+              <a:latin typeface="Times New Roman" panose="02020603050405020304" pitchFamily="18" charset="0"/>
+              <a:ea typeface="Times New Roman" panose="02020603050405020304" pitchFamily="18" charset="0"/>
+              <a:cs typeface="Times New Roman" panose="02020603050405020304" pitchFamily="18" charset="0"/>
+            </a:endParaRPr>
+          </a:p>
+          <a:p>
+            <a:pPr algn="ctr">
+              <a:spcBef>
+                <a:spcPts val="600"/>
+              </a:spcBef>
+            </a:pPr>
+            <a:r>
+              <a:rPr lang="es-PE" sz="1400" dirty="0">
+                <a:latin typeface="Times New Roman" panose="02020603050405020304" pitchFamily="18" charset="0"/>
+                <a:ea typeface="Cambria Math" panose="02040503050406030204" pitchFamily="18" charset="0"/>
+                <a:cs typeface="Times New Roman" panose="02020603050405020304" pitchFamily="18" charset="0"/>
+              </a:rPr>
+              <a:t>Por tanto, se expide el presente {{MODELO_MINUSCULA}} otorgándole los privilegios y consideraciones que le corresponden.</a:t>
+            </a:r>
+          </a:p>
+          <a:p>
+            <a:pPr algn="r">
+              <a:spcBef>
+                <a:spcPts val="600"/>
+              </a:spcBef>
+            </a:pPr>
+            <a:r>
+              <a:rPr lang="es-PE" sz="1400" dirty="0">
+                <a:solidFill>
+                  <a:prstClr val="black"/>
+                </a:solidFill>
+                <a:latin typeface="Times New Roman" panose="02020603050405020304" pitchFamily="18" charset="0"/>
+                <a:ea typeface="Cambria Math" panose="02040503050406030204" pitchFamily="18" charset="0"/>
+                <a:cs typeface="Times New Roman" panose="02020603050405020304" pitchFamily="18" charset="0"/>
+              </a:rPr>
+              <a:t>Trujillo, {{FECHA_EMISION_LARGA}}</a:t>
+            </a:r>
+            <a:endParaRPr lang="en-US" sz="1400" dirty="0">
+              <a:solidFill>
+                <a:prstClr val="black"/>
+              </a:solidFill>
+              <a:latin typeface="Times New Roman" panose="02020603050405020304" pitchFamily="18" charset="0"/>
+              <a:ea typeface="Cambria Math" panose="02040503050406030204" pitchFamily="18" charset="0"/>
+              <a:cs typeface="Times New Roman" panose="02020603050405020304" pitchFamily="18" charset="0"/>
+            </a:endParaRPr>
+          </a:p>
+        </p:txBody>
+      </p:sp>
     </p:spTree>
     <p:extLst>
       <p:ext uri="{BB962C8B-B14F-4D97-AF65-F5344CB8AC3E}">
@@ -5389,7 +5313,7 @@
         <p:spPr>
           <a:xfrm>
             <a:off x="4541929" y="8673847"/>
-            <a:ext cx="2130198" cy="366767"/>
+            <a:ext cx="2130198" cy="382156"/>
           </a:xfrm>
           <a:prstGeom prst="rect">
             <a:avLst/>
@@ -5424,7 +5348,18 @@
                 <a:spcPts val="59"/>
               </a:spcBef>
             </a:pPr>
-            <a:endParaRPr lang="en-US" sz="800" b="1" dirty="0">
+            <a:r>
+              <a:rPr lang="es-PE" sz="900" b="1">
+                <a:solidFill>
+                  <a:prstClr val="black"/>
+                </a:solidFill>
+                <a:latin typeface="Times New Roman" panose="02020603050405020304" pitchFamily="18" charset="0"/>
+                <a:ea typeface="Cambria Math" panose="02040503050406030204" pitchFamily="18" charset="0"/>
+                <a:cs typeface="Times New Roman" panose="02020603050405020304" pitchFamily="18" charset="0"/>
+              </a:rPr>
+              <a:t>{{CODE_STUDENT}}</a:t>
+            </a:r>
+            <a:endParaRPr lang="es-PE" sz="900" b="1" dirty="0">
               <a:solidFill>
                 <a:prstClr val="black"/>
               </a:solidFill>
